--- a/undergrad/slides/modulethree.pptx
+++ b/undergrad/slides/modulethree.pptx
@@ -3962,9 +3962,41 @@
         <p:nvPr/>
       </p:nvGrpSpPr>
       <p:grpSpPr/>
+      <p:sp>
+        <p:nvSpPr>
+          <p:cNvPr id="2" name="Title 1"/>
+          <p:cNvSpPr>
+            <a:spLocks noGrp="1"/>
+          </p:cNvSpPr>
+          <p:nvPr>
+            <p:ph type="title"/>
+          </p:nvPr>
+        </p:nvSpPr>
+        <p:spPr>
+          <a:xfrm>
+            <a:off x="-12191695" y="0"/>
+            <a:ext cx="12191695" cy="914400"/>
+          </a:xfrm>
+        </p:spPr>
+        <p:txBody>
+          <a:bodyPr/>
+          <a:lstStyle/>
+          <a:p>
+            <a:r>
+              <a:t>Module Three: Reading at Scale</a:t>
+            </a:r>
+          </a:p>
+        </p:txBody>
+      </p:sp>
       <p:grpSp>
         <p:nvGrpSpPr>
-          <p:cNvPr id="2" name="Group 1"/>
+          <p:cNvPr id="3" name="Window ENG3861.EXE">
+            <a:extLst>
+              <a:ext uri="{C183D7F6-B498-43B3-948B-1728B52AA6E4}">
+                <adec:decorative xmlns:adec="http://schemas.microsoft.com/office/drawing/2017/decorative" val="1"/>
+              </a:ext>
+            </a:extLst>
+          </p:cNvPr>
           <p:cNvGrpSpPr/>
           <p:nvPr/>
         </p:nvGrpSpPr>
@@ -3978,7 +4010,7 @@
         </p:grpSpPr>
         <p:sp>
           <p:nvSpPr>
-            <p:cNvPr id="3" name="Rectangle 2"/>
+            <p:cNvPr id="4" name="Rectangle 3"/>
             <p:cNvSpPr/>
             <p:nvPr/>
           </p:nvSpPr>
@@ -4022,7 +4054,7 @@
         </p:sp>
         <p:sp>
           <p:nvSpPr>
-            <p:cNvPr id="4" name="Rectangle 3"/>
+            <p:cNvPr id="5" name="Rectangle 4"/>
             <p:cNvSpPr/>
             <p:nvPr/>
           </p:nvSpPr>
@@ -4068,7 +4100,7 @@
         </p:sp>
         <p:sp>
           <p:nvSpPr>
-            <p:cNvPr id="5" name="Rectangle 4"/>
+            <p:cNvPr id="6" name="Rectangle 5"/>
             <p:cNvSpPr/>
             <p:nvPr/>
           </p:nvSpPr>
@@ -4114,7 +4146,7 @@
         </p:sp>
         <p:sp>
           <p:nvSpPr>
-            <p:cNvPr id="6" name="Rectangle 5"/>
+            <p:cNvPr id="7" name="Rectangle 6"/>
             <p:cNvSpPr/>
             <p:nvPr/>
           </p:nvSpPr>
@@ -4160,7 +4192,7 @@
         </p:sp>
         <p:sp>
           <p:nvSpPr>
-            <p:cNvPr id="7" name="Rectangle 6"/>
+            <p:cNvPr id="8" name="Rectangle 7"/>
             <p:cNvSpPr/>
             <p:nvPr/>
           </p:nvSpPr>
@@ -4206,7 +4238,7 @@
         </p:sp>
         <p:sp>
           <p:nvSpPr>
-            <p:cNvPr id="8" name="Rectangle 7"/>
+            <p:cNvPr id="9" name="Rectangle 8"/>
             <p:cNvSpPr/>
             <p:nvPr/>
           </p:nvSpPr>
@@ -4252,7 +4284,7 @@
         </p:sp>
         <p:sp>
           <p:nvSpPr>
-            <p:cNvPr id="9" name="TextBox 8"/>
+            <p:cNvPr id="10" name="TextBox 9"/>
             <p:cNvSpPr txBox="1"/>
             <p:nvPr/>
           </p:nvSpPr>
@@ -4285,16 +4317,134 @@
           </p:txBody>
         </p:sp>
       </p:grpSp>
-      <p:sp>
-        <p:nvSpPr>
-          <p:cNvPr id="10" name="TextBox 9"/>
+      <p:grpSp>
+        <p:nvGrpSpPr>
+          <p:cNvPr id="11" name="Unit WORDS"/>
+          <p:cNvGrpSpPr/>
+          <p:nvPr/>
+        </p:nvGrpSpPr>
+        <p:grpSpPr>
+          <a:xfrm>
+            <a:off x="1371600" y="2560574"/>
+            <a:ext cx="1542978" cy="512064"/>
+            <a:chOff x="1371600" y="2560574"/>
+            <a:chExt cx="1542978" cy="512064"/>
+          </a:xfrm>
+        </p:grpSpPr>
+        <p:sp>
+          <p:nvSpPr>
+            <p:cNvPr id="12" name="Rounded Rectangle 11"/>
+            <p:cNvSpPr/>
+            <p:nvPr/>
+          </p:nvSpPr>
+          <p:spPr>
+            <a:xfrm>
+              <a:off x="1426464" y="2615438"/>
+              <a:ext cx="1488114" cy="457200"/>
+            </a:xfrm>
+            <a:prstGeom prst="roundRect">
+              <a:avLst>
+                <a:gd name="adj" fmla="val 50000"/>
+              </a:avLst>
+            </a:prstGeom>
+            <a:solidFill>
+              <a:srgbClr val="1B1035"/>
+            </a:solidFill>
+            <a:ln>
+              <a:noFill/>
+            </a:ln>
+            <a:effectLst/>
+          </p:spPr>
+          <p:style>
+            <a:lnRef idx="1">
+              <a:schemeClr val="accent1"/>
+            </a:lnRef>
+            <a:fillRef idx="3">
+              <a:schemeClr val="accent1"/>
+            </a:fillRef>
+            <a:effectRef idx="2">
+              <a:schemeClr val="accent1"/>
+            </a:effectRef>
+            <a:fontRef idx="minor">
+              <a:schemeClr val="lt1"/>
+            </a:fontRef>
+          </p:style>
+          <p:txBody>
+            <a:bodyPr rtlCol="0" anchor="ctr"/>
+            <a:lstStyle/>
+            <a:p>
+              <a:pPr algn="ctr"/>
+            </a:p>
+          </p:txBody>
+        </p:sp>
+        <p:sp>
+          <p:nvSpPr>
+            <p:cNvPr id="13" name="Rounded Rectangle 12"/>
+            <p:cNvSpPr/>
+            <p:nvPr/>
+          </p:nvSpPr>
+          <p:spPr>
+            <a:xfrm>
+              <a:off x="1371600" y="2560574"/>
+              <a:ext cx="1488114" cy="457200"/>
+            </a:xfrm>
+            <a:prstGeom prst="roundRect">
+              <a:avLst>
+                <a:gd name="adj" fmla="val 50000"/>
+              </a:avLst>
+            </a:prstGeom>
+            <a:solidFill>
+              <a:srgbClr val="2E5BFF"/>
+            </a:solidFill>
+            <a:ln w="31750">
+              <a:solidFill>
+                <a:srgbClr val="1B1035"/>
+              </a:solidFill>
+            </a:ln>
+            <a:effectLst/>
+          </p:spPr>
+          <p:style>
+            <a:lnRef idx="1">
+              <a:schemeClr val="accent1"/>
+            </a:lnRef>
+            <a:fillRef idx="3">
+              <a:schemeClr val="accent1"/>
+            </a:fillRef>
+            <a:effectRef idx="2">
+              <a:schemeClr val="accent1"/>
+            </a:effectRef>
+            <a:fontRef idx="minor">
+              <a:schemeClr val="lt1"/>
+            </a:fontRef>
+          </p:style>
+          <p:txBody>
+            <a:bodyPr rtlCol="0" anchor="ctr" lIns="0" rIns="0" tIns="0" bIns="0" wrap="none"/>
+            <a:lstStyle/>
+            <a:p>
+              <a:pPr algn="ctr"/>
+              <a:r>
+                <a:rPr sz="1800" b="0" i="0">
+                  <a:solidFill>
+                    <a:srgbClr val="FFFFFF"/>
+                  </a:solidFill>
+                  <a:latin typeface="Arial Black"/>
+                </a:rPr>
+                <a:t>WORDS</a:t>
+              </a:r>
+            </a:p>
+          </p:txBody>
+        </p:sp>
+      </p:grpSp>
+      <p:sp>
+        <p:nvSpPr>
+          <p:cNvPr id="14" name="TextBox 13"/>
           <p:cNvSpPr txBox="1"/>
           <p:nvPr/>
         </p:nvSpPr>
         <p:spPr>
           <a:xfrm>
-            <a:off x="1280160" y="1645920"/>
-            <a:ext cx="9631375" cy="4069080"/>
+            <a:off x="1280160" y="3200654"/>
+            <a:ext cx="9631375" cy="2514346"/>
           </a:xfrm>
           <a:prstGeom prst="rect">
             <a:avLst/>
@@ -4302,21 +4452,10 @@
           <a:noFill/>
         </p:spPr>
         <p:txBody>
-          <a:bodyPr wrap="square" anchor="ctr">
+          <a:bodyPr wrap="square" anchor="t">
             <a:normAutofit/>
           </a:bodyPr>
           <a:lstStyle/>
-          <a:p>
-            <a:r>
-              <a:rPr sz="1800" b="0" i="0">
-                <a:solidFill>
-                  <a:srgbClr val="2E5BFF"/>
-                </a:solidFill>
-                <a:latin typeface="Arial Black"/>
-              </a:rPr>
-              <a:t>WORDS</a:t>
-            </a:r>
-          </a:p>
           <a:p>
             <a:r>
               <a:rPr sz="2400" b="0" i="0">
@@ -4380,14 +4519,40 @@
       <p:grpSpPr/>
       <p:sp>
         <p:nvSpPr>
-          <p:cNvPr id="2" name="TextBox 1"/>
+          <p:cNvPr id="2" name="Title 1"/>
+          <p:cNvSpPr>
+            <a:spLocks noGrp="1"/>
+          </p:cNvSpPr>
+          <p:nvPr>
+            <p:ph type="title"/>
+          </p:nvPr>
+        </p:nvSpPr>
+        <p:spPr>
+          <a:xfrm>
+            <a:off x="-12191695" y="0"/>
+            <a:ext cx="12191695" cy="914400"/>
+          </a:xfrm>
+        </p:spPr>
+        <p:txBody>
+          <a:bodyPr/>
+          <a:lstStyle/>
+          <a:p>
+            <a:r>
+              <a:t>Texts become data</a:t>
+            </a:r>
+          </a:p>
+        </p:txBody>
+      </p:sp>
+      <p:sp>
+        <p:nvSpPr>
+          <p:cNvPr id="3" name="TextBox 2"/>
           <p:cNvSpPr txBox="1"/>
           <p:nvPr/>
         </p:nvSpPr>
         <p:spPr>
           <a:xfrm>
-            <a:off x="731520" y="1463040"/>
-            <a:ext cx="10728655" cy="2926080"/>
+            <a:off x="274320" y="1417320"/>
+            <a:ext cx="11643055" cy="4023360"/>
           </a:xfrm>
           <a:prstGeom prst="rect">
             <a:avLst/>
@@ -4439,9 +4604,41 @@
         <p:nvPr/>
       </p:nvGrpSpPr>
       <p:grpSpPr/>
+      <p:sp>
+        <p:nvSpPr>
+          <p:cNvPr id="2" name="Title 1"/>
+          <p:cNvSpPr>
+            <a:spLocks noGrp="1"/>
+          </p:cNvSpPr>
+          <p:nvPr>
+            <p:ph type="title"/>
+          </p:nvPr>
+        </p:nvSpPr>
+        <p:spPr>
+          <a:xfrm>
+            <a:off x="-12191695" y="0"/>
+            <a:ext cx="12191695" cy="914400"/>
+          </a:xfrm>
+        </p:spPr>
+        <p:txBody>
+          <a:bodyPr/>
+          <a:lstStyle/>
+          <a:p>
+            <a:r>
+              <a:t>Before any of this works, someone has to digitize the books</a:t>
+            </a:r>
+          </a:p>
+        </p:txBody>
+      </p:sp>
       <p:grpSp>
         <p:nvGrpSpPr>
-          <p:cNvPr id="2" name="Group 1"/>
+          <p:cNvPr id="3" name="Window image.png">
+            <a:extLst>
+              <a:ext uri="{C183D7F6-B498-43B3-948B-1728B52AA6E4}">
+                <adec:decorative xmlns:adec="http://schemas.microsoft.com/office/drawing/2017/decorative" val="1"/>
+              </a:ext>
+            </a:extLst>
+          </p:cNvPr>
           <p:cNvGrpSpPr/>
           <p:nvPr/>
         </p:nvGrpSpPr>
@@ -4455,7 +4652,7 @@
         </p:grpSpPr>
         <p:sp>
           <p:nvSpPr>
-            <p:cNvPr id="3" name="Rectangle 2"/>
+            <p:cNvPr id="4" name="Rectangle 3"/>
             <p:cNvSpPr/>
             <p:nvPr/>
           </p:nvSpPr>
@@ -4499,7 +4696,7 @@
         </p:sp>
         <p:sp>
           <p:nvSpPr>
-            <p:cNvPr id="4" name="Rectangle 3"/>
+            <p:cNvPr id="5" name="Rectangle 4"/>
             <p:cNvSpPr/>
             <p:nvPr/>
           </p:nvSpPr>
@@ -4545,7 +4742,7 @@
         </p:sp>
         <p:sp>
           <p:nvSpPr>
-            <p:cNvPr id="5" name="Rectangle 4"/>
+            <p:cNvPr id="6" name="Rectangle 5"/>
             <p:cNvSpPr/>
             <p:nvPr/>
           </p:nvSpPr>
@@ -4591,7 +4788,7 @@
         </p:sp>
         <p:sp>
           <p:nvSpPr>
-            <p:cNvPr id="6" name="Rectangle 5"/>
+            <p:cNvPr id="7" name="Rectangle 6"/>
             <p:cNvSpPr/>
             <p:nvPr/>
           </p:nvSpPr>
@@ -4637,7 +4834,7 @@
         </p:sp>
         <p:sp>
           <p:nvSpPr>
-            <p:cNvPr id="7" name="Rectangle 6"/>
+            <p:cNvPr id="8" name="Rectangle 7"/>
             <p:cNvSpPr/>
             <p:nvPr/>
           </p:nvSpPr>
@@ -4683,7 +4880,7 @@
         </p:sp>
         <p:sp>
           <p:nvSpPr>
-            <p:cNvPr id="8" name="Rectangle 7"/>
+            <p:cNvPr id="9" name="Rectangle 8"/>
             <p:cNvSpPr/>
             <p:nvPr/>
           </p:nvSpPr>
@@ -4729,7 +4926,7 @@
         </p:sp>
         <p:sp>
           <p:nvSpPr>
-            <p:cNvPr id="9" name="TextBox 8"/>
+            <p:cNvPr id="10" name="TextBox 9"/>
             <p:cNvSpPr txBox="1"/>
             <p:nvPr/>
           </p:nvSpPr>
@@ -4764,7 +4961,7 @@
       </p:grpSp>
       <p:pic>
         <p:nvPicPr>
-          <p:cNvPr id="10" name="Picture 9" descr="A book-scanning rig: an open book rests in a V-shaped cradle under a dark angular frame with a mounted camera and lights overhead."/>
+          <p:cNvPr id="11" name="Picture 10" descr="A book-scanning rig: an open book rests in a V-shaped cradle under a dark angular frame with a mounted camera and lights overhead."/>
           <p:cNvPicPr>
             <a:picLocks noChangeAspect="1"/>
           </p:cNvPicPr>
@@ -4788,13 +4985,13 @@
       </p:pic>
       <p:sp>
         <p:nvSpPr>
-          <p:cNvPr id="11" name="TextBox 10"/>
+          <p:cNvPr id="12" name="TextBox 11"/>
           <p:cNvSpPr txBox="1"/>
           <p:nvPr/>
         </p:nvSpPr>
         <p:spPr>
           <a:xfrm>
-            <a:off x="822960" y="5989320"/>
+            <a:off x="822960" y="5943600"/>
             <a:ext cx="10545775" cy="731520"/>
           </a:xfrm>
           <a:prstGeom prst="rect">
@@ -4847,9 +5044,41 @@
         <p:nvPr/>
       </p:nvGrpSpPr>
       <p:grpSpPr/>
+      <p:sp>
+        <p:nvSpPr>
+          <p:cNvPr id="2" name="Title 1"/>
+          <p:cNvSpPr>
+            <a:spLocks noGrp="1"/>
+          </p:cNvSpPr>
+          <p:nvPr>
+            <p:ph type="title"/>
+          </p:nvPr>
+        </p:nvSpPr>
+        <p:spPr>
+          <a:xfrm>
+            <a:off x="-12191695" y="0"/>
+            <a:ext cx="12191695" cy="914400"/>
+          </a:xfrm>
+        </p:spPr>
+        <p:txBody>
+          <a:bodyPr/>
+          <a:lstStyle/>
+          <a:p>
+            <a:r>
+              <a:t>Today, whole libraries are scanned to train AI models</a:t>
+            </a:r>
+          </a:p>
+        </p:txBody>
+      </p:sp>
       <p:grpSp>
         <p:nvGrpSpPr>
-          <p:cNvPr id="2" name="Group 1"/>
+          <p:cNvPr id="3" name="Window image.png">
+            <a:extLst>
+              <a:ext uri="{C183D7F6-B498-43B3-948B-1728B52AA6E4}">
+                <adec:decorative xmlns:adec="http://schemas.microsoft.com/office/drawing/2017/decorative" val="1"/>
+              </a:ext>
+            </a:extLst>
+          </p:cNvPr>
           <p:cNvGrpSpPr/>
           <p:nvPr/>
         </p:nvGrpSpPr>
@@ -4863,7 +5092,7 @@
         </p:grpSpPr>
         <p:sp>
           <p:nvSpPr>
-            <p:cNvPr id="3" name="Rectangle 2"/>
+            <p:cNvPr id="4" name="Rectangle 3"/>
             <p:cNvSpPr/>
             <p:nvPr/>
           </p:nvSpPr>
@@ -4907,7 +5136,7 @@
         </p:sp>
         <p:sp>
           <p:nvSpPr>
-            <p:cNvPr id="4" name="Rectangle 3"/>
+            <p:cNvPr id="5" name="Rectangle 4"/>
             <p:cNvSpPr/>
             <p:nvPr/>
           </p:nvSpPr>
@@ -4953,7 +5182,7 @@
         </p:sp>
         <p:sp>
           <p:nvSpPr>
-            <p:cNvPr id="5" name="Rectangle 4"/>
+            <p:cNvPr id="6" name="Rectangle 5"/>
             <p:cNvSpPr/>
             <p:nvPr/>
           </p:nvSpPr>
@@ -4999,7 +5228,7 @@
         </p:sp>
         <p:sp>
           <p:nvSpPr>
-            <p:cNvPr id="6" name="Rectangle 5"/>
+            <p:cNvPr id="7" name="Rectangle 6"/>
             <p:cNvSpPr/>
             <p:nvPr/>
           </p:nvSpPr>
@@ -5045,7 +5274,7 @@
         </p:sp>
         <p:sp>
           <p:nvSpPr>
-            <p:cNvPr id="7" name="Rectangle 6"/>
+            <p:cNvPr id="8" name="Rectangle 7"/>
             <p:cNvSpPr/>
             <p:nvPr/>
           </p:nvSpPr>
@@ -5091,7 +5320,7 @@
         </p:sp>
         <p:sp>
           <p:nvSpPr>
-            <p:cNvPr id="8" name="Rectangle 7"/>
+            <p:cNvPr id="9" name="Rectangle 8"/>
             <p:cNvSpPr/>
             <p:nvPr/>
           </p:nvSpPr>
@@ -5137,7 +5366,7 @@
         </p:sp>
         <p:sp>
           <p:nvSpPr>
-            <p:cNvPr id="9" name="TextBox 8"/>
+            <p:cNvPr id="10" name="TextBox 9"/>
             <p:cNvSpPr txBox="1"/>
             <p:nvPr/>
           </p:nvSpPr>
@@ -5172,7 +5401,7 @@
       </p:grpSp>
       <p:pic>
         <p:nvPicPr>
-          <p:cNvPr id="10" name="Picture 9" descr="New Yorker headline 'Destroying Books to Build a Mind: Anthropic is trying to destructively scan all the books in the world. How worried should we be?' over an image of a book torn open to reveal circuit-board traces."/>
+          <p:cNvPr id="11" name="Picture 10" descr="New Yorker headline 'Destroying Books to Build a Mind: Anthropic is trying to destructively scan all the books in the world. How worried should we be?' over an image of a book torn open to reveal circuit-board traces."/>
           <p:cNvPicPr>
             <a:picLocks noChangeAspect="1"/>
           </p:cNvPicPr>
@@ -5196,13 +5425,13 @@
       </p:pic>
       <p:sp>
         <p:nvSpPr>
-          <p:cNvPr id="11" name="TextBox 10"/>
+          <p:cNvPr id="12" name="TextBox 11"/>
           <p:cNvSpPr txBox="1"/>
           <p:nvPr/>
         </p:nvSpPr>
         <p:spPr>
           <a:xfrm>
-            <a:off x="822960" y="5989320"/>
+            <a:off x="822960" y="5943600"/>
             <a:ext cx="10545775" cy="731520"/>
           </a:xfrm>
           <a:prstGeom prst="rect">
@@ -5267,14 +5496,40 @@
       <p:grpSpPr/>
       <p:sp>
         <p:nvSpPr>
-          <p:cNvPr id="2" name="TextBox 1"/>
+          <p:cNvPr id="2" name="Title 1"/>
+          <p:cNvSpPr>
+            <a:spLocks noGrp="1"/>
+          </p:cNvSpPr>
+          <p:nvPr>
+            <p:ph type="title"/>
+          </p:nvPr>
+        </p:nvSpPr>
+        <p:spPr>
+          <a:xfrm>
+            <a:off x="-12191695" y="0"/>
+            <a:ext cx="12191695" cy="914400"/>
+          </a:xfrm>
+        </p:spPr>
+        <p:txBody>
+          <a:bodyPr/>
+          <a:lstStyle/>
+          <a:p>
+            <a:r>
+              <a:t>How did they make that?</a:t>
+            </a:r>
+          </a:p>
+        </p:txBody>
+      </p:sp>
+      <p:sp>
+        <p:nvSpPr>
+          <p:cNvPr id="3" name="TextBox 2"/>
           <p:cNvSpPr txBox="1"/>
           <p:nvPr/>
         </p:nvSpPr>
         <p:spPr>
           <a:xfrm>
-            <a:off x="731520" y="1463040"/>
-            <a:ext cx="10728655" cy="2926080"/>
+            <a:off x="274320" y="1417320"/>
+            <a:ext cx="11643055" cy="4023360"/>
           </a:xfrm>
           <a:prstGeom prst="rect">
             <a:avLst/>
@@ -5299,7 +5554,11 @@
             </a:r>
           </a:p>
           <a:p>
-            <a:pPr algn="ctr"/>
+            <a:pPr algn="ctr">
+              <a:spcBef>
+                <a:spcPts val="1000"/>
+              </a:spcBef>
+            </a:pPr>
             <a:r>
               <a:rPr sz="2800" b="0" i="0">
                 <a:solidFill>
@@ -5338,9 +5597,41 @@
         <p:nvPr/>
       </p:nvGrpSpPr>
       <p:grpSpPr/>
+      <p:sp>
+        <p:nvSpPr>
+          <p:cNvPr id="2" name="Title 1"/>
+          <p:cNvSpPr>
+            <a:spLocks noGrp="1"/>
+          </p:cNvSpPr>
+          <p:nvPr>
+            <p:ph type="title"/>
+          </p:nvPr>
+        </p:nvSpPr>
+        <p:spPr>
+          <a:xfrm>
+            <a:off x="-12191695" y="0"/>
+            <a:ext cx="12191695" cy="914400"/>
+          </a:xfrm>
+        </p:spPr>
+        <p:txBody>
+          <a:bodyPr/>
+          <a:lstStyle/>
+          <a:p>
+            <a:r>
+              <a:t>Quote: Miriam Posner, 2013</a:t>
+            </a:r>
+          </a:p>
+        </p:txBody>
+      </p:sp>
       <p:grpSp>
         <p:nvGrpSpPr>
-          <p:cNvPr id="2" name="Group 1"/>
+          <p:cNvPr id="3" name="Window quote.txt">
+            <a:extLst>
+              <a:ext uri="{C183D7F6-B498-43B3-948B-1728B52AA6E4}">
+                <adec:decorative xmlns:adec="http://schemas.microsoft.com/office/drawing/2017/decorative" val="1"/>
+              </a:ext>
+            </a:extLst>
+          </p:cNvPr>
           <p:cNvGrpSpPr/>
           <p:nvPr/>
         </p:nvGrpSpPr>
@@ -5354,7 +5645,7 @@
         </p:grpSpPr>
         <p:sp>
           <p:nvSpPr>
-            <p:cNvPr id="3" name="Rectangle 2"/>
+            <p:cNvPr id="4" name="Rectangle 3"/>
             <p:cNvSpPr/>
             <p:nvPr/>
           </p:nvSpPr>
@@ -5398,7 +5689,7 @@
         </p:sp>
         <p:sp>
           <p:nvSpPr>
-            <p:cNvPr id="4" name="Rectangle 3"/>
+            <p:cNvPr id="5" name="Rectangle 4"/>
             <p:cNvSpPr/>
             <p:nvPr/>
           </p:nvSpPr>
@@ -5444,7 +5735,7 @@
         </p:sp>
         <p:sp>
           <p:nvSpPr>
-            <p:cNvPr id="5" name="Rectangle 4"/>
+            <p:cNvPr id="6" name="Rectangle 5"/>
             <p:cNvSpPr/>
             <p:nvPr/>
           </p:nvSpPr>
@@ -5490,7 +5781,7 @@
         </p:sp>
         <p:sp>
           <p:nvSpPr>
-            <p:cNvPr id="6" name="Rectangle 5"/>
+            <p:cNvPr id="7" name="Rectangle 6"/>
             <p:cNvSpPr/>
             <p:nvPr/>
           </p:nvSpPr>
@@ -5536,7 +5827,7 @@
         </p:sp>
         <p:sp>
           <p:nvSpPr>
-            <p:cNvPr id="7" name="Rectangle 6"/>
+            <p:cNvPr id="8" name="Rectangle 7"/>
             <p:cNvSpPr/>
             <p:nvPr/>
           </p:nvSpPr>
@@ -5582,7 +5873,7 @@
         </p:sp>
         <p:sp>
           <p:nvSpPr>
-            <p:cNvPr id="8" name="Rectangle 7"/>
+            <p:cNvPr id="9" name="Rectangle 8"/>
             <p:cNvSpPr/>
             <p:nvPr/>
           </p:nvSpPr>
@@ -5628,7 +5919,7 @@
         </p:sp>
         <p:sp>
           <p:nvSpPr>
-            <p:cNvPr id="9" name="TextBox 8"/>
+            <p:cNvPr id="10" name="TextBox 9"/>
             <p:cNvSpPr txBox="1"/>
             <p:nvPr/>
           </p:nvSpPr>
@@ -5663,7 +5954,7 @@
       </p:grpSp>
       <p:sp>
         <p:nvSpPr>
-          <p:cNvPr id="10" name="TextBox 9"/>
+          <p:cNvPr id="11" name="TextBox 10"/>
           <p:cNvSpPr txBox="1"/>
           <p:nvPr/>
         </p:nvSpPr>
@@ -5697,7 +5988,7 @@
       </p:sp>
       <p:sp>
         <p:nvSpPr>
-          <p:cNvPr id="11" name="TextBox 10"/>
+          <p:cNvPr id="12" name="TextBox 11"/>
           <p:cNvSpPr txBox="1"/>
           <p:nvPr/>
         </p:nvSpPr>
@@ -5766,9 +6057,41 @@
         <p:nvPr/>
       </p:nvGrpSpPr>
       <p:grpSpPr/>
+      <p:sp>
+        <p:nvSpPr>
+          <p:cNvPr id="2" name="Title 1"/>
+          <p:cNvSpPr>
+            <a:spLocks noGrp="1"/>
+          </p:cNvSpPr>
+          <p:nvPr>
+            <p:ph type="title"/>
+          </p:nvPr>
+        </p:nvSpPr>
+        <p:spPr>
+          <a:xfrm>
+            <a:off x="-12191695" y="0"/>
+            <a:ext cx="12191695" cy="914400"/>
+          </a:xfrm>
+        </p:spPr>
+        <p:txBody>
+          <a:bodyPr/>
+          <a:lstStyle/>
+          <a:p>
+            <a:r>
+              <a:t>Quote: Miriam Posner, 2013 (one of her example projects)</a:t>
+            </a:r>
+          </a:p>
+        </p:txBody>
+      </p:sp>
       <p:grpSp>
         <p:nvGrpSpPr>
-          <p:cNvPr id="2" name="Group 1"/>
+          <p:cNvPr id="3" name="Window quote.txt">
+            <a:extLst>
+              <a:ext uri="{C183D7F6-B498-43B3-948B-1728B52AA6E4}">
+                <adec:decorative xmlns:adec="http://schemas.microsoft.com/office/drawing/2017/decorative" val="1"/>
+              </a:ext>
+            </a:extLst>
+          </p:cNvPr>
           <p:cNvGrpSpPr/>
           <p:nvPr/>
         </p:nvGrpSpPr>
@@ -5782,7 +6105,7 @@
         </p:grpSpPr>
         <p:sp>
           <p:nvSpPr>
-            <p:cNvPr id="3" name="Rectangle 2"/>
+            <p:cNvPr id="4" name="Rectangle 3"/>
             <p:cNvSpPr/>
             <p:nvPr/>
           </p:nvSpPr>
@@ -5826,7 +6149,7 @@
         </p:sp>
         <p:sp>
           <p:nvSpPr>
-            <p:cNvPr id="4" name="Rectangle 3"/>
+            <p:cNvPr id="5" name="Rectangle 4"/>
             <p:cNvSpPr/>
             <p:nvPr/>
           </p:nvSpPr>
@@ -5872,7 +6195,7 @@
         </p:sp>
         <p:sp>
           <p:nvSpPr>
-            <p:cNvPr id="5" name="Rectangle 4"/>
+            <p:cNvPr id="6" name="Rectangle 5"/>
             <p:cNvSpPr/>
             <p:nvPr/>
           </p:nvSpPr>
@@ -5918,7 +6241,7 @@
         </p:sp>
         <p:sp>
           <p:nvSpPr>
-            <p:cNvPr id="6" name="Rectangle 5"/>
+            <p:cNvPr id="7" name="Rectangle 6"/>
             <p:cNvSpPr/>
             <p:nvPr/>
           </p:nvSpPr>
@@ -5964,7 +6287,7 @@
         </p:sp>
         <p:sp>
           <p:nvSpPr>
-            <p:cNvPr id="7" name="Rectangle 6"/>
+            <p:cNvPr id="8" name="Rectangle 7"/>
             <p:cNvSpPr/>
             <p:nvPr/>
           </p:nvSpPr>
@@ -6010,7 +6333,7 @@
         </p:sp>
         <p:sp>
           <p:nvSpPr>
-            <p:cNvPr id="8" name="Rectangle 7"/>
+            <p:cNvPr id="9" name="Rectangle 8"/>
             <p:cNvSpPr/>
             <p:nvPr/>
           </p:nvSpPr>
@@ -6056,7 +6379,7 @@
         </p:sp>
         <p:sp>
           <p:nvSpPr>
-            <p:cNvPr id="9" name="TextBox 8"/>
+            <p:cNvPr id="10" name="TextBox 9"/>
             <p:cNvSpPr txBox="1"/>
             <p:nvPr/>
           </p:nvSpPr>
@@ -6091,7 +6414,7 @@
       </p:grpSp>
       <p:sp>
         <p:nvSpPr>
-          <p:cNvPr id="10" name="TextBox 9"/>
+          <p:cNvPr id="11" name="TextBox 10"/>
           <p:cNvSpPr txBox="1"/>
           <p:nvPr/>
         </p:nvSpPr>
@@ -6125,7 +6448,7 @@
       </p:sp>
       <p:sp>
         <p:nvSpPr>
-          <p:cNvPr id="11" name="TextBox 10"/>
+          <p:cNvPr id="12" name="TextBox 11"/>
           <p:cNvSpPr txBox="1"/>
           <p:nvPr/>
         </p:nvSpPr>
@@ -6196,7 +6519,33 @@
       <p:grpSpPr/>
       <p:sp>
         <p:nvSpPr>
-          <p:cNvPr id="2" name="TextBox 1"/>
+          <p:cNvPr id="2" name="Title 1"/>
+          <p:cNvSpPr>
+            <a:spLocks noGrp="1"/>
+          </p:cNvSpPr>
+          <p:nvPr>
+            <p:ph type="title"/>
+          </p:nvPr>
+        </p:nvSpPr>
+        <p:spPr>
+          <a:xfrm>
+            <a:off x="-12191695" y="0"/>
+            <a:ext cx="12191695" cy="914400"/>
+          </a:xfrm>
+        </p:spPr>
+        <p:txBody>
+          <a:bodyPr/>
+          <a:lstStyle/>
+          <a:p>
+            <a:r>
+              <a:t>Posner's breakdown</a:t>
+            </a:r>
+          </a:p>
+        </p:txBody>
+      </p:sp>
+      <p:sp>
+        <p:nvSpPr>
+          <p:cNvPr id="3" name="TextBox 2"/>
           <p:cNvSpPr txBox="1"/>
           <p:nvPr/>
         </p:nvSpPr>
@@ -6230,7 +6579,7 @@
       </p:sp>
       <p:sp>
         <p:nvSpPr>
-          <p:cNvPr id="3" name="TextBox 2"/>
+          <p:cNvPr id="4" name="TextBox 3"/>
           <p:cNvSpPr txBox="1"/>
           <p:nvPr/>
         </p:nvSpPr>
@@ -6355,9 +6704,41 @@
         <p:nvPr/>
       </p:nvGrpSpPr>
       <p:grpSpPr/>
+      <p:sp>
+        <p:nvSpPr>
+          <p:cNvPr id="2" name="Title 1"/>
+          <p:cNvSpPr>
+            <a:spLocks noGrp="1"/>
+          </p:cNvSpPr>
+          <p:nvPr>
+            <p:ph type="title"/>
+          </p:nvPr>
+        </p:nvSpPr>
+        <p:spPr>
+          <a:xfrm>
+            <a:off x="-12191695" y="0"/>
+            <a:ext cx="12191695" cy="914400"/>
+          </a:xfrm>
+        </p:spPr>
+        <p:txBody>
+          <a:bodyPr/>
+          <a:lstStyle/>
+          <a:p>
+            <a:r>
+              <a:t>Quote: Miriam Posner, 2013</a:t>
+            </a:r>
+          </a:p>
+        </p:txBody>
+      </p:sp>
       <p:grpSp>
         <p:nvGrpSpPr>
-          <p:cNvPr id="2" name="Group 1"/>
+          <p:cNvPr id="3" name="Window quote.txt">
+            <a:extLst>
+              <a:ext uri="{C183D7F6-B498-43B3-948B-1728B52AA6E4}">
+                <adec:decorative xmlns:adec="http://schemas.microsoft.com/office/drawing/2017/decorative" val="1"/>
+              </a:ext>
+            </a:extLst>
+          </p:cNvPr>
           <p:cNvGrpSpPr/>
           <p:nvPr/>
         </p:nvGrpSpPr>
@@ -6371,7 +6752,7 @@
         </p:grpSpPr>
         <p:sp>
           <p:nvSpPr>
-            <p:cNvPr id="3" name="Rectangle 2"/>
+            <p:cNvPr id="4" name="Rectangle 3"/>
             <p:cNvSpPr/>
             <p:nvPr/>
           </p:nvSpPr>
@@ -6415,7 +6796,7 @@
         </p:sp>
         <p:sp>
           <p:nvSpPr>
-            <p:cNvPr id="4" name="Rectangle 3"/>
+            <p:cNvPr id="5" name="Rectangle 4"/>
             <p:cNvSpPr/>
             <p:nvPr/>
           </p:nvSpPr>
@@ -6461,7 +6842,7 @@
         </p:sp>
         <p:sp>
           <p:nvSpPr>
-            <p:cNvPr id="5" name="Rectangle 4"/>
+            <p:cNvPr id="6" name="Rectangle 5"/>
             <p:cNvSpPr/>
             <p:nvPr/>
           </p:nvSpPr>
@@ -6507,7 +6888,7 @@
         </p:sp>
         <p:sp>
           <p:nvSpPr>
-            <p:cNvPr id="6" name="Rectangle 5"/>
+            <p:cNvPr id="7" name="Rectangle 6"/>
             <p:cNvSpPr/>
             <p:nvPr/>
           </p:nvSpPr>
@@ -6553,7 +6934,7 @@
         </p:sp>
         <p:sp>
           <p:nvSpPr>
-            <p:cNvPr id="7" name="Rectangle 6"/>
+            <p:cNvPr id="8" name="Rectangle 7"/>
             <p:cNvSpPr/>
             <p:nvPr/>
           </p:nvSpPr>
@@ -6599,7 +6980,7 @@
         </p:sp>
         <p:sp>
           <p:nvSpPr>
-            <p:cNvPr id="8" name="Rectangle 7"/>
+            <p:cNvPr id="9" name="Rectangle 8"/>
             <p:cNvSpPr/>
             <p:nvPr/>
           </p:nvSpPr>
@@ -6645,7 +7026,7 @@
         </p:sp>
         <p:sp>
           <p:nvSpPr>
-            <p:cNvPr id="9" name="TextBox 8"/>
+            <p:cNvPr id="10" name="TextBox 9"/>
             <p:cNvSpPr txBox="1"/>
             <p:nvPr/>
           </p:nvSpPr>
@@ -6680,7 +7061,7 @@
       </p:grpSp>
       <p:sp>
         <p:nvSpPr>
-          <p:cNvPr id="10" name="TextBox 9"/>
+          <p:cNvPr id="11" name="TextBox 10"/>
           <p:cNvSpPr txBox="1"/>
           <p:nvPr/>
         </p:nvSpPr>
@@ -6714,7 +7095,7 @@
       </p:sp>
       <p:sp>
         <p:nvSpPr>
-          <p:cNvPr id="11" name="TextBox 10"/>
+          <p:cNvPr id="12" name="TextBox 11"/>
           <p:cNvSpPr txBox="1"/>
           <p:nvPr/>
         </p:nvSpPr>
@@ -6783,9 +7164,41 @@
         <p:nvPr/>
       </p:nvGrpSpPr>
       <p:grpSpPr/>
+      <p:sp>
+        <p:nvSpPr>
+          <p:cNvPr id="2" name="Title 1"/>
+          <p:cNvSpPr>
+            <a:spLocks noGrp="1"/>
+          </p:cNvSpPr>
+          <p:nvPr>
+            <p:ph type="title"/>
+          </p:nvPr>
+        </p:nvSpPr>
+        <p:spPr>
+          <a:xfrm>
+            <a:off x="-12191695" y="0"/>
+            <a:ext cx="12191695" cy="914400"/>
+          </a:xfrm>
+        </p:spPr>
+        <p:txBody>
+          <a:bodyPr/>
+          <a:lstStyle/>
+          <a:p>
+            <a:r>
+              <a:t>Frankenstein in Voyant. Spot the words that aren't from the novel.</a:t>
+            </a:r>
+          </a:p>
+        </p:txBody>
+      </p:sp>
       <p:grpSp>
         <p:nvGrpSpPr>
-          <p:cNvPr id="2" name="Group 1"/>
+          <p:cNvPr id="3" name="Window image.png">
+            <a:extLst>
+              <a:ext uri="{C183D7F6-B498-43B3-948B-1728B52AA6E4}">
+                <adec:decorative xmlns:adec="http://schemas.microsoft.com/office/drawing/2017/decorative" val="1"/>
+              </a:ext>
+            </a:extLst>
+          </p:cNvPr>
           <p:cNvGrpSpPr/>
           <p:nvPr/>
         </p:nvGrpSpPr>
@@ -6799,7 +7212,7 @@
         </p:grpSpPr>
         <p:sp>
           <p:nvSpPr>
-            <p:cNvPr id="3" name="Rectangle 2"/>
+            <p:cNvPr id="4" name="Rectangle 3"/>
             <p:cNvSpPr/>
             <p:nvPr/>
           </p:nvSpPr>
@@ -6843,7 +7256,7 @@
         </p:sp>
         <p:sp>
           <p:nvSpPr>
-            <p:cNvPr id="4" name="Rectangle 3"/>
+            <p:cNvPr id="5" name="Rectangle 4"/>
             <p:cNvSpPr/>
             <p:nvPr/>
           </p:nvSpPr>
@@ -6889,7 +7302,7 @@
         </p:sp>
         <p:sp>
           <p:nvSpPr>
-            <p:cNvPr id="5" name="Rectangle 4"/>
+            <p:cNvPr id="6" name="Rectangle 5"/>
             <p:cNvSpPr/>
             <p:nvPr/>
           </p:nvSpPr>
@@ -6935,7 +7348,7 @@
         </p:sp>
         <p:sp>
           <p:nvSpPr>
-            <p:cNvPr id="6" name="Rectangle 5"/>
+            <p:cNvPr id="7" name="Rectangle 6"/>
             <p:cNvSpPr/>
             <p:nvPr/>
           </p:nvSpPr>
@@ -6981,7 +7394,7 @@
         </p:sp>
         <p:sp>
           <p:nvSpPr>
-            <p:cNvPr id="7" name="Rectangle 6"/>
+            <p:cNvPr id="8" name="Rectangle 7"/>
             <p:cNvSpPr/>
             <p:nvPr/>
           </p:nvSpPr>
@@ -7027,7 +7440,7 @@
         </p:sp>
         <p:sp>
           <p:nvSpPr>
-            <p:cNvPr id="8" name="Rectangle 7"/>
+            <p:cNvPr id="9" name="Rectangle 8"/>
             <p:cNvSpPr/>
             <p:nvPr/>
           </p:nvSpPr>
@@ -7073,7 +7486,7 @@
         </p:sp>
         <p:sp>
           <p:nvSpPr>
-            <p:cNvPr id="9" name="TextBox 8"/>
+            <p:cNvPr id="10" name="TextBox 9"/>
             <p:cNvSpPr txBox="1"/>
             <p:nvPr/>
           </p:nvSpPr>
@@ -7108,7 +7521,7 @@
       </p:grpSp>
       <p:pic>
         <p:nvPicPr>
-          <p:cNvPr id="10" name="Picture 9" descr="Voyant Tools with Frankenstein loaded: a Cirrus word cloud led by man, eyes, life, and father, but also gutenberg and project; the Reader panel showing the Project Gutenberg license text; a Trends line chart; a corpus summary; and a Contexts table for the word man."/>
+          <p:cNvPr id="11" name="Picture 10" descr="Voyant Tools with Frankenstein loaded: a Cirrus word cloud led by man, eyes, life, and father, but also gutenberg and project; the Reader panel showing the Project Gutenberg license text; a Trends line chart; a corpus summary; and a Contexts table for the word man."/>
           <p:cNvPicPr>
             <a:picLocks noChangeAspect="1"/>
           </p:cNvPicPr>
@@ -7132,13 +7545,13 @@
       </p:pic>
       <p:sp>
         <p:nvSpPr>
-          <p:cNvPr id="11" name="TextBox 10"/>
+          <p:cNvPr id="12" name="TextBox 11"/>
           <p:cNvSpPr txBox="1"/>
           <p:nvPr/>
         </p:nvSpPr>
         <p:spPr>
           <a:xfrm>
-            <a:off x="822960" y="5989320"/>
+            <a:off x="822960" y="5943600"/>
             <a:ext cx="10545775" cy="731520"/>
           </a:xfrm>
           <a:prstGeom prst="rect">
@@ -7219,9 +7632,41 @@
         <p:nvPr/>
       </p:nvGrpSpPr>
       <p:grpSpPr/>
+      <p:sp>
+        <p:nvSpPr>
+          <p:cNvPr id="2" name="Title 1"/>
+          <p:cNvSpPr>
+            <a:spLocks noGrp="1"/>
+          </p:cNvSpPr>
+          <p:nvPr>
+            <p:ph type="title"/>
+          </p:nvPr>
+        </p:nvSpPr>
+        <p:spPr>
+          <a:xfrm>
+            <a:off x="-12191695" y="0"/>
+            <a:ext cx="12191695" cy="914400"/>
+          </a:xfrm>
+        </p:spPr>
+        <p:txBody>
+          <a:bodyPr/>
+          <a:lstStyle/>
+          <a:p>
+            <a:r>
+              <a:t>The same novel, cleaned: license text removed and common words filtered out</a:t>
+            </a:r>
+          </a:p>
+        </p:txBody>
+      </p:sp>
       <p:grpSp>
         <p:nvGrpSpPr>
-          <p:cNvPr id="2" name="Group 1"/>
+          <p:cNvPr id="3" name="Window image.png">
+            <a:extLst>
+              <a:ext uri="{C183D7F6-B498-43B3-948B-1728B52AA6E4}">
+                <adec:decorative xmlns:adec="http://schemas.microsoft.com/office/drawing/2017/decorative" val="1"/>
+              </a:ext>
+            </a:extLst>
+          </p:cNvPr>
           <p:cNvGrpSpPr/>
           <p:nvPr/>
         </p:nvGrpSpPr>
@@ -7235,7 +7680,7 @@
         </p:grpSpPr>
         <p:sp>
           <p:nvSpPr>
-            <p:cNvPr id="3" name="Rectangle 2"/>
+            <p:cNvPr id="4" name="Rectangle 3"/>
             <p:cNvSpPr/>
             <p:nvPr/>
           </p:nvSpPr>
@@ -7279,7 +7724,7 @@
         </p:sp>
         <p:sp>
           <p:nvSpPr>
-            <p:cNvPr id="4" name="Rectangle 3"/>
+            <p:cNvPr id="5" name="Rectangle 4"/>
             <p:cNvSpPr/>
             <p:nvPr/>
           </p:nvSpPr>
@@ -7325,7 +7770,7 @@
         </p:sp>
         <p:sp>
           <p:nvSpPr>
-            <p:cNvPr id="5" name="Rectangle 4"/>
+            <p:cNvPr id="6" name="Rectangle 5"/>
             <p:cNvSpPr/>
             <p:nvPr/>
           </p:nvSpPr>
@@ -7371,7 +7816,7 @@
         </p:sp>
         <p:sp>
           <p:nvSpPr>
-            <p:cNvPr id="6" name="Rectangle 5"/>
+            <p:cNvPr id="7" name="Rectangle 6"/>
             <p:cNvSpPr/>
             <p:nvPr/>
           </p:nvSpPr>
@@ -7417,7 +7862,7 @@
         </p:sp>
         <p:sp>
           <p:nvSpPr>
-            <p:cNvPr id="7" name="Rectangle 6"/>
+            <p:cNvPr id="8" name="Rectangle 7"/>
             <p:cNvSpPr/>
             <p:nvPr/>
           </p:nvSpPr>
@@ -7463,7 +7908,7 @@
         </p:sp>
         <p:sp>
           <p:nvSpPr>
-            <p:cNvPr id="8" name="Rectangle 7"/>
+            <p:cNvPr id="9" name="Rectangle 8"/>
             <p:cNvSpPr/>
             <p:nvPr/>
           </p:nvSpPr>
@@ -7509,7 +7954,7 @@
         </p:sp>
         <p:sp>
           <p:nvSpPr>
-            <p:cNvPr id="9" name="TextBox 8"/>
+            <p:cNvPr id="10" name="TextBox 9"/>
             <p:cNvSpPr txBox="1"/>
             <p:nvPr/>
           </p:nvSpPr>
@@ -7544,7 +7989,7 @@
       </p:grpSp>
       <p:pic>
         <p:nvPicPr>
-          <p:cNvPr id="10" name="Picture 9" descr="A word cloud of Frankenstein with the Project Gutenberg license text removed, dominated by father and man, with life, eyes, time, night, Elizabeth, mind, heart, and death."/>
+          <p:cNvPr id="11" name="Picture 10" descr="A word cloud of Frankenstein with the Project Gutenberg license text removed, dominated by father and man, with life, eyes, time, night, Elizabeth, mind, heart, and death."/>
           <p:cNvPicPr>
             <a:picLocks noChangeAspect="1"/>
           </p:cNvPicPr>
@@ -7568,13 +8013,13 @@
       </p:pic>
       <p:sp>
         <p:nvSpPr>
-          <p:cNvPr id="11" name="TextBox 10"/>
+          <p:cNvPr id="12" name="TextBox 11"/>
           <p:cNvSpPr txBox="1"/>
           <p:nvPr/>
         </p:nvSpPr>
         <p:spPr>
           <a:xfrm>
-            <a:off x="822960" y="5989320"/>
+            <a:off x="822960" y="5943600"/>
             <a:ext cx="10545775" cy="731520"/>
           </a:xfrm>
           <a:prstGeom prst="rect">
@@ -7629,7 +8074,33 @@
       <p:grpSpPr/>
       <p:sp>
         <p:nvSpPr>
-          <p:cNvPr id="2" name="TextBox 1"/>
+          <p:cNvPr id="2" name="Title 1"/>
+          <p:cNvSpPr>
+            <a:spLocks noGrp="1"/>
+          </p:cNvSpPr>
+          <p:nvPr>
+            <p:ph type="title"/>
+          </p:nvPr>
+        </p:nvSpPr>
+        <p:spPr>
+          <a:xfrm>
+            <a:off x="-12191695" y="0"/>
+            <a:ext cx="12191695" cy="914400"/>
+          </a:xfrm>
+        </p:spPr>
+        <p:txBody>
+          <a:bodyPr/>
+          <a:lstStyle/>
+          <a:p>
+            <a:r>
+              <a:t>Readings</a:t>
+            </a:r>
+          </a:p>
+        </p:txBody>
+      </p:sp>
+      <p:sp>
+        <p:nvSpPr>
+          <p:cNvPr id="3" name="TextBox 2"/>
           <p:cNvSpPr txBox="1"/>
           <p:nvPr/>
         </p:nvSpPr>
@@ -7663,7 +8134,7 @@
       </p:sp>
       <p:sp>
         <p:nvSpPr>
-          <p:cNvPr id="3" name="TextBox 2"/>
+          <p:cNvPr id="4" name="TextBox 3"/>
           <p:cNvSpPr txBox="1"/>
           <p:nvPr/>
         </p:nvSpPr>
@@ -7724,7 +8195,7 @@
                 </a:solidFill>
                 <a:latin typeface="Verdana"/>
               </a:rPr>
-              <a:t>— a friendly tour of text analysis</a:t>
+              <a:t> — a friendly tour of text analysis</a:t>
             </a:r>
           </a:p>
           <a:p>
@@ -7769,7 +8240,7 @@
                 </a:solidFill>
                 <a:latin typeface="Verdana"/>
               </a:rPr>
-              <a:t>— real DH projects, and what you'd need to know to build them</a:t>
+              <a:t> — real DH projects, and what you'd need to know to build them</a:t>
             </a:r>
           </a:p>
         </p:txBody>
@@ -7802,14 +8273,40 @@
       <p:grpSpPr/>
       <p:sp>
         <p:nvSpPr>
-          <p:cNvPr id="2" name="TextBox 1"/>
+          <p:cNvPr id="2" name="Title 1"/>
+          <p:cNvSpPr>
+            <a:spLocks noGrp="1"/>
+          </p:cNvSpPr>
+          <p:nvPr>
+            <p:ph type="title"/>
+          </p:nvPr>
+        </p:nvSpPr>
+        <p:spPr>
+          <a:xfrm>
+            <a:off x="-12191695" y="0"/>
+            <a:ext cx="12191695" cy="914400"/>
+          </a:xfrm>
+        </p:spPr>
+        <p:txBody>
+          <a:bodyPr/>
+          <a:lstStyle/>
+          <a:p>
+            <a:r>
+              <a:t>Distant reading with AI</a:t>
+            </a:r>
+          </a:p>
+        </p:txBody>
+      </p:sp>
+      <p:sp>
+        <p:nvSpPr>
+          <p:cNvPr id="3" name="TextBox 2"/>
           <p:cNvSpPr txBox="1"/>
           <p:nvPr/>
         </p:nvSpPr>
         <p:spPr>
           <a:xfrm>
-            <a:off x="731520" y="1463040"/>
-            <a:ext cx="10728655" cy="2926080"/>
+            <a:off x="274320" y="1417320"/>
+            <a:ext cx="11643055" cy="4023360"/>
           </a:xfrm>
           <a:prstGeom prst="rect">
             <a:avLst/>
@@ -7834,7 +8331,11 @@
             </a:r>
           </a:p>
           <a:p>
-            <a:pPr algn="ctr"/>
+            <a:pPr algn="ctr">
+              <a:spcBef>
+                <a:spcPts val="1000"/>
+              </a:spcBef>
+            </a:pPr>
             <a:r>
               <a:rPr sz="2800" b="0" i="0">
                 <a:solidFill>
@@ -7873,9 +8374,41 @@
         <p:nvPr/>
       </p:nvGrpSpPr>
       <p:grpSpPr/>
+      <p:sp>
+        <p:nvSpPr>
+          <p:cNvPr id="2" name="Title 1"/>
+          <p:cNvSpPr>
+            <a:spLocks noGrp="1"/>
+          </p:cNvSpPr>
+          <p:nvPr>
+            <p:ph type="title"/>
+          </p:nvPr>
+        </p:nvSpPr>
+        <p:spPr>
+          <a:xfrm>
+            <a:off x="-12191695" y="0"/>
+            <a:ext cx="12191695" cy="914400"/>
+          </a:xfrm>
+        </p:spPr>
+        <p:txBody>
+          <a:bodyPr/>
+          <a:lstStyle/>
+          <a:p>
+            <a:r>
+              <a:t>A decade of Dr. Dobb's Journal, distant-read with Claude</a:t>
+            </a:r>
+          </a:p>
+        </p:txBody>
+      </p:sp>
       <p:grpSp>
         <p:nvGrpSpPr>
-          <p:cNvPr id="2" name="Group 1"/>
+          <p:cNvPr id="3" name="Window image.png">
+            <a:extLst>
+              <a:ext uri="{C183D7F6-B498-43B3-948B-1728B52AA6E4}">
+                <adec:decorative xmlns:adec="http://schemas.microsoft.com/office/drawing/2017/decorative" val="1"/>
+              </a:ext>
+            </a:extLst>
+          </p:cNvPr>
           <p:cNvGrpSpPr/>
           <p:nvPr/>
         </p:nvGrpSpPr>
@@ -7889,7 +8422,7 @@
         </p:grpSpPr>
         <p:sp>
           <p:nvSpPr>
-            <p:cNvPr id="3" name="Rectangle 2"/>
+            <p:cNvPr id="4" name="Rectangle 3"/>
             <p:cNvSpPr/>
             <p:nvPr/>
           </p:nvSpPr>
@@ -7933,7 +8466,7 @@
         </p:sp>
         <p:sp>
           <p:nvSpPr>
-            <p:cNvPr id="4" name="Rectangle 3"/>
+            <p:cNvPr id="5" name="Rectangle 4"/>
             <p:cNvSpPr/>
             <p:nvPr/>
           </p:nvSpPr>
@@ -7979,7 +8512,7 @@
         </p:sp>
         <p:sp>
           <p:nvSpPr>
-            <p:cNvPr id="5" name="Rectangle 4"/>
+            <p:cNvPr id="6" name="Rectangle 5"/>
             <p:cNvSpPr/>
             <p:nvPr/>
           </p:nvSpPr>
@@ -8025,7 +8558,7 @@
         </p:sp>
         <p:sp>
           <p:nvSpPr>
-            <p:cNvPr id="6" name="Rectangle 5"/>
+            <p:cNvPr id="7" name="Rectangle 6"/>
             <p:cNvSpPr/>
             <p:nvPr/>
           </p:nvSpPr>
@@ -8071,7 +8604,7 @@
         </p:sp>
         <p:sp>
           <p:nvSpPr>
-            <p:cNvPr id="7" name="Rectangle 6"/>
+            <p:cNvPr id="8" name="Rectangle 7"/>
             <p:cNvSpPr/>
             <p:nvPr/>
           </p:nvSpPr>
@@ -8117,7 +8650,7 @@
         </p:sp>
         <p:sp>
           <p:nvSpPr>
-            <p:cNvPr id="8" name="Rectangle 7"/>
+            <p:cNvPr id="9" name="Rectangle 8"/>
             <p:cNvSpPr/>
             <p:nvPr/>
           </p:nvSpPr>
@@ -8163,7 +8696,7 @@
         </p:sp>
         <p:sp>
           <p:nvSpPr>
-            <p:cNvPr id="9" name="TextBox 8"/>
+            <p:cNvPr id="10" name="TextBox 9"/>
             <p:cNvSpPr txBox="1"/>
             <p:nvPr/>
           </p:nvSpPr>
@@ -8198,7 +8731,7 @@
       </p:grpSp>
       <p:pic>
         <p:nvPicPr>
-          <p:cNvPr id="10" name="Picture 9" descr="Claude-built 'Dr. Dobb's Distant Read' dashboard showing corpus statistics, a bar chart of words per volume, and a volume register table."/>
+          <p:cNvPr id="11" name="Picture 10" descr="Claude-built 'Dr. Dobb's Distant Read' dashboard showing corpus statistics, a bar chart of words per volume, and a volume register table."/>
           <p:cNvPicPr>
             <a:picLocks noChangeAspect="1"/>
           </p:cNvPicPr>
@@ -8222,13 +8755,13 @@
       </p:pic>
       <p:sp>
         <p:nvSpPr>
-          <p:cNvPr id="11" name="TextBox 10"/>
+          <p:cNvPr id="12" name="TextBox 11"/>
           <p:cNvSpPr txBox="1"/>
           <p:nvPr/>
         </p:nvSpPr>
         <p:spPr>
           <a:xfrm>
-            <a:off x="822960" y="5989320"/>
+            <a:off x="822960" y="5943600"/>
             <a:ext cx="10545775" cy="731520"/>
           </a:xfrm>
           <a:prstGeom prst="rect">
@@ -8309,9 +8842,41 @@
         <p:nvPr/>
       </p:nvGrpSpPr>
       <p:grpSpPr/>
+      <p:sp>
+        <p:nvSpPr>
+          <p:cNvPr id="2" name="Title 1"/>
+          <p:cNvSpPr>
+            <a:spLocks noGrp="1"/>
+          </p:cNvSpPr>
+          <p:nvPr>
+            <p:ph type="title"/>
+          </p:nvPr>
+        </p:nvSpPr>
+        <p:spPr>
+          <a:xfrm>
+            <a:off x="-12191695" y="0"/>
+            <a:ext cx="12191695" cy="914400"/>
+          </a:xfrm>
+        </p:spPr>
+        <p:txBody>
+          <a:bodyPr/>
+          <a:lstStyle/>
+          <a:p>
+            <a:r>
+              <a:t>A concordance (keyword in context), the same idea as Voyant's Contexts tool</a:t>
+            </a:r>
+          </a:p>
+        </p:txBody>
+      </p:sp>
       <p:grpSp>
         <p:nvGrpSpPr>
-          <p:cNvPr id="2" name="Group 1"/>
+          <p:cNvPr id="3" name="Window image.png">
+            <a:extLst>
+              <a:ext uri="{C183D7F6-B498-43B3-948B-1728B52AA6E4}">
+                <adec:decorative xmlns:adec="http://schemas.microsoft.com/office/drawing/2017/decorative" val="1"/>
+              </a:ext>
+            </a:extLst>
+          </p:cNvPr>
           <p:cNvGrpSpPr/>
           <p:nvPr/>
         </p:nvGrpSpPr>
@@ -8325,7 +8890,7 @@
         </p:grpSpPr>
         <p:sp>
           <p:nvSpPr>
-            <p:cNvPr id="3" name="Rectangle 2"/>
+            <p:cNvPr id="4" name="Rectangle 3"/>
             <p:cNvSpPr/>
             <p:nvPr/>
           </p:nvSpPr>
@@ -8369,7 +8934,7 @@
         </p:sp>
         <p:sp>
           <p:nvSpPr>
-            <p:cNvPr id="4" name="Rectangle 3"/>
+            <p:cNvPr id="5" name="Rectangle 4"/>
             <p:cNvSpPr/>
             <p:nvPr/>
           </p:nvSpPr>
@@ -8415,7 +8980,7 @@
         </p:sp>
         <p:sp>
           <p:nvSpPr>
-            <p:cNvPr id="5" name="Rectangle 4"/>
+            <p:cNvPr id="6" name="Rectangle 5"/>
             <p:cNvSpPr/>
             <p:nvPr/>
           </p:nvSpPr>
@@ -8461,7 +9026,7 @@
         </p:sp>
         <p:sp>
           <p:nvSpPr>
-            <p:cNvPr id="6" name="Rectangle 5"/>
+            <p:cNvPr id="7" name="Rectangle 6"/>
             <p:cNvSpPr/>
             <p:nvPr/>
           </p:nvSpPr>
@@ -8507,7 +9072,7 @@
         </p:sp>
         <p:sp>
           <p:nvSpPr>
-            <p:cNvPr id="7" name="Rectangle 6"/>
+            <p:cNvPr id="8" name="Rectangle 7"/>
             <p:cNvSpPr/>
             <p:nvPr/>
           </p:nvSpPr>
@@ -8553,7 +9118,7 @@
         </p:sp>
         <p:sp>
           <p:nvSpPr>
-            <p:cNvPr id="8" name="Rectangle 7"/>
+            <p:cNvPr id="9" name="Rectangle 8"/>
             <p:cNvSpPr/>
             <p:nvPr/>
           </p:nvSpPr>
@@ -8599,7 +9164,7 @@
         </p:sp>
         <p:sp>
           <p:nvSpPr>
-            <p:cNvPr id="9" name="TextBox 8"/>
+            <p:cNvPr id="10" name="TextBox 9"/>
             <p:cNvSpPr txBox="1"/>
             <p:nvPr/>
           </p:nvSpPr>
@@ -8634,7 +9199,7 @@
       </p:grpSp>
       <p:pic>
         <p:nvPicPr>
-          <p:cNvPr id="10" name="Picture 9" descr="Concordance view titled 'Words in context' showing 183 matches for 'public domain,' a line chart of matches per 10,000 tokens, and a list of nearby words."/>
+          <p:cNvPr id="11" name="Picture 10" descr="Concordance view titled 'Words in context' showing 183 matches for 'public domain,' a line chart of matches per 10,000 tokens, and a list of nearby words."/>
           <p:cNvPicPr>
             <a:picLocks noChangeAspect="1"/>
           </p:cNvPicPr>
@@ -8658,13 +9223,13 @@
       </p:pic>
       <p:sp>
         <p:nvSpPr>
-          <p:cNvPr id="11" name="TextBox 10"/>
+          <p:cNvPr id="12" name="TextBox 11"/>
           <p:cNvSpPr txBox="1"/>
           <p:nvPr/>
         </p:nvSpPr>
         <p:spPr>
           <a:xfrm>
-            <a:off x="822960" y="5989320"/>
+            <a:off x="822960" y="5943600"/>
             <a:ext cx="10545775" cy="731520"/>
           </a:xfrm>
           <a:prstGeom prst="rect">
@@ -8729,14 +9294,40 @@
       <p:grpSpPr/>
       <p:sp>
         <p:nvSpPr>
-          <p:cNvPr id="2" name="TextBox 1"/>
+          <p:cNvPr id="2" name="Title 1"/>
+          <p:cNvSpPr>
+            <a:spLocks noGrp="1"/>
+          </p:cNvSpPr>
+          <p:nvPr>
+            <p:ph type="title"/>
+          </p:nvPr>
+        </p:nvSpPr>
+        <p:spPr>
+          <a:xfrm>
+            <a:off x="-12191695" y="0"/>
+            <a:ext cx="12191695" cy="914400"/>
+          </a:xfrm>
+        </p:spPr>
+        <p:txBody>
+          <a:bodyPr/>
+          <a:lstStyle/>
+          <a:p>
+            <a:r>
+              <a:t>Next week, Do: Distant Reading with Voyant and AI</a:t>
+            </a:r>
+          </a:p>
+        </p:txBody>
+      </p:sp>
+      <p:sp>
+        <p:nvSpPr>
+          <p:cNvPr id="3" name="TextBox 2"/>
           <p:cNvSpPr txBox="1"/>
           <p:nvPr/>
         </p:nvSpPr>
         <p:spPr>
           <a:xfrm>
-            <a:off x="731520" y="1463040"/>
-            <a:ext cx="10728655" cy="2926080"/>
+            <a:off x="274320" y="1417320"/>
+            <a:ext cx="11643055" cy="4023360"/>
           </a:xfrm>
           <a:prstGeom prst="rect">
             <a:avLst/>
@@ -8751,19 +9342,33 @@
           <a:p>
             <a:pPr algn="ctr"/>
             <a:r>
-              <a:rPr sz="5400" b="0" i="0">
+              <a:rPr sz="4400" b="0" i="0">
                 <a:solidFill>
                   <a:srgbClr val="FFFFFF"/>
                 </a:solidFill>
                 <a:latin typeface="Arial Black"/>
               </a:rPr>
-              <a:t>Next week, Do: Distant Reading with Voyant and AI</a:t>
-            </a:r>
-          </a:p>
-          <a:p>
-            <a:pPr algn="ctr"/>
-            <a:r>
-              <a:rPr sz="2800" b="0" i="0">
+              <a:t>Next week, Do:</a:t>
+            </a:r>
+            <a:br/>
+            <a:r>
+              <a:rPr sz="4400" b="0" i="0">
+                <a:solidFill>
+                  <a:srgbClr val="FFFFFF"/>
+                </a:solidFill>
+                <a:latin typeface="Arial Black"/>
+              </a:rPr>
+              <a:t>Distant Reading with Voyant and AI</a:t>
+            </a:r>
+          </a:p>
+          <a:p>
+            <a:pPr algn="ctr">
+              <a:spcBef>
+                <a:spcPts val="1000"/>
+              </a:spcBef>
+            </a:pPr>
+            <a:r>
+              <a:rPr sz="2400" b="0" i="0">
                 <a:solidFill>
                   <a:srgbClr val="FFFFFF"/>
                 </a:solidFill>
@@ -8802,7 +9407,33 @@
       <p:grpSpPr/>
       <p:sp>
         <p:nvSpPr>
-          <p:cNvPr id="2" name="TextBox 1"/>
+          <p:cNvPr id="2" name="Title 1"/>
+          <p:cNvSpPr>
+            <a:spLocks noGrp="1"/>
+          </p:cNvSpPr>
+          <p:nvPr>
+            <p:ph type="title"/>
+          </p:nvPr>
+        </p:nvSpPr>
+        <p:spPr>
+          <a:xfrm>
+            <a:off x="-12191695" y="0"/>
+            <a:ext cx="12191695" cy="914400"/>
+          </a:xfrm>
+        </p:spPr>
+        <p:txBody>
+          <a:bodyPr/>
+          <a:lstStyle/>
+          <a:p>
+            <a:r>
+              <a:t>Four steps</a:t>
+            </a:r>
+          </a:p>
+        </p:txBody>
+      </p:sp>
+      <p:sp>
+        <p:nvSpPr>
+          <p:cNvPr id="3" name="TextBox 2"/>
           <p:cNvSpPr txBox="1"/>
           <p:nvPr/>
         </p:nvSpPr>
@@ -8836,7 +9467,7 @@
       </p:sp>
       <p:sp>
         <p:nvSpPr>
-          <p:cNvPr id="3" name="TextBox 2"/>
+          <p:cNvPr id="4" name="TextBox 3"/>
           <p:cNvSpPr txBox="1"/>
           <p:nvPr/>
         </p:nvSpPr>
@@ -8989,9 +9620,41 @@
         <p:nvPr/>
       </p:nvGrpSpPr>
       <p:grpSpPr/>
+      <p:sp>
+        <p:nvSpPr>
+          <p:cNvPr id="2" name="Title 1"/>
+          <p:cNvSpPr>
+            <a:spLocks noGrp="1"/>
+          </p:cNvSpPr>
+          <p:nvPr>
+            <p:ph type="title"/>
+          </p:nvPr>
+        </p:nvSpPr>
+        <p:spPr>
+          <a:xfrm>
+            <a:off x="-12191695" y="0"/>
+            <a:ext cx="12191695" cy="914400"/>
+          </a:xfrm>
+        </p:spPr>
+        <p:txBody>
+          <a:bodyPr/>
+          <a:lstStyle/>
+          <a:p>
+            <a:r>
+              <a:t>Prompt: then search for those passages in Voyant's Contexts</a:t>
+            </a:r>
+          </a:p>
+        </p:txBody>
+      </p:sp>
       <p:grpSp>
         <p:nvGrpSpPr>
-          <p:cNvPr id="2" name="Group 1"/>
+          <p:cNvPr id="3" name="Window prompt.exe">
+            <a:extLst>
+              <a:ext uri="{C183D7F6-B498-43B3-948B-1728B52AA6E4}">
+                <adec:decorative xmlns:adec="http://schemas.microsoft.com/office/drawing/2017/decorative" val="1"/>
+              </a:ext>
+            </a:extLst>
+          </p:cNvPr>
           <p:cNvGrpSpPr/>
           <p:nvPr/>
         </p:nvGrpSpPr>
@@ -9005,7 +9668,7 @@
         </p:grpSpPr>
         <p:sp>
           <p:nvSpPr>
-            <p:cNvPr id="3" name="Rectangle 2"/>
+            <p:cNvPr id="4" name="Rectangle 3"/>
             <p:cNvSpPr/>
             <p:nvPr/>
           </p:nvSpPr>
@@ -9049,7 +9712,7 @@
         </p:sp>
         <p:sp>
           <p:nvSpPr>
-            <p:cNvPr id="4" name="Rectangle 3"/>
+            <p:cNvPr id="5" name="Rectangle 4"/>
             <p:cNvSpPr/>
             <p:nvPr/>
           </p:nvSpPr>
@@ -9095,7 +9758,7 @@
         </p:sp>
         <p:sp>
           <p:nvSpPr>
-            <p:cNvPr id="5" name="Rectangle 4"/>
+            <p:cNvPr id="6" name="Rectangle 5"/>
             <p:cNvSpPr/>
             <p:nvPr/>
           </p:nvSpPr>
@@ -9141,7 +9804,7 @@
         </p:sp>
         <p:sp>
           <p:nvSpPr>
-            <p:cNvPr id="6" name="Rectangle 5"/>
+            <p:cNvPr id="7" name="Rectangle 6"/>
             <p:cNvSpPr/>
             <p:nvPr/>
           </p:nvSpPr>
@@ -9187,7 +9850,7 @@
         </p:sp>
         <p:sp>
           <p:nvSpPr>
-            <p:cNvPr id="7" name="Rectangle 6"/>
+            <p:cNvPr id="8" name="Rectangle 7"/>
             <p:cNvSpPr/>
             <p:nvPr/>
           </p:nvSpPr>
@@ -9233,7 +9896,7 @@
         </p:sp>
         <p:sp>
           <p:nvSpPr>
-            <p:cNvPr id="8" name="Rectangle 7"/>
+            <p:cNvPr id="9" name="Rectangle 8"/>
             <p:cNvSpPr/>
             <p:nvPr/>
           </p:nvSpPr>
@@ -9279,7 +9942,7 @@
         </p:sp>
         <p:sp>
           <p:nvSpPr>
-            <p:cNvPr id="9" name="TextBox 8"/>
+            <p:cNvPr id="10" name="TextBox 9"/>
             <p:cNvSpPr txBox="1"/>
             <p:nvPr/>
           </p:nvSpPr>
@@ -9314,7 +9977,7 @@
       </p:grpSp>
       <p:sp>
         <p:nvSpPr>
-          <p:cNvPr id="10" name="TextBox 9"/>
+          <p:cNvPr id="11" name="TextBox 10"/>
           <p:cNvSpPr txBox="1"/>
           <p:nvPr/>
         </p:nvSpPr>
@@ -9345,6 +10008,11 @@
             </a:r>
           </a:p>
           <a:p>
+            <a:pPr>
+              <a:spcBef>
+                <a:spcPts val="600"/>
+              </a:spcBef>
+            </a:pPr>
             <a:r>
               <a:rPr sz="2800" b="1" i="0">
                 <a:solidFill>
@@ -9352,7 +10020,7 @@
                 </a:solidFill>
                 <a:latin typeface="Courier New"/>
               </a:rPr>
-              <a:t>&gt;</a:t>
+              <a:t>&gt; </a:t>
             </a:r>
             <a:r>
               <a:rPr sz="2800" b="0" i="0">
@@ -9392,9 +10060,41 @@
         <p:nvPr/>
       </p:nvGrpSpPr>
       <p:grpSpPr/>
+      <p:sp>
+        <p:nvSpPr>
+          <p:cNvPr id="2" name="Title 1"/>
+          <p:cNvSpPr>
+            <a:spLocks noGrp="1"/>
+          </p:cNvSpPr>
+          <p:nvPr>
+            <p:ph type="title"/>
+          </p:nvPr>
+        </p:nvSpPr>
+        <p:spPr>
+          <a:xfrm>
+            <a:off x="-12191695" y="0"/>
+            <a:ext cx="12191695" cy="914400"/>
+          </a:xfrm>
+        </p:spPr>
+        <p:txBody>
+          <a:bodyPr/>
+          <a:lstStyle/>
+          <a:p>
+            <a:r>
+              <a:t>Discussion question</a:t>
+            </a:r>
+          </a:p>
+        </p:txBody>
+      </p:sp>
       <p:grpSp>
         <p:nvGrpSpPr>
-          <p:cNvPr id="2" name="Group 1"/>
+          <p:cNvPr id="3" name="Window discuss.txt">
+            <a:extLst>
+              <a:ext uri="{C183D7F6-B498-43B3-948B-1728B52AA6E4}">
+                <adec:decorative xmlns:adec="http://schemas.microsoft.com/office/drawing/2017/decorative" val="1"/>
+              </a:ext>
+            </a:extLst>
+          </p:cNvPr>
           <p:cNvGrpSpPr/>
           <p:nvPr/>
         </p:nvGrpSpPr>
@@ -9408,7 +10108,7 @@
         </p:grpSpPr>
         <p:sp>
           <p:nvSpPr>
-            <p:cNvPr id="3" name="Rectangle 2"/>
+            <p:cNvPr id="4" name="Rectangle 3"/>
             <p:cNvSpPr/>
             <p:nvPr/>
           </p:nvSpPr>
@@ -9452,7 +10152,7 @@
         </p:sp>
         <p:sp>
           <p:nvSpPr>
-            <p:cNvPr id="4" name="Rectangle 3"/>
+            <p:cNvPr id="5" name="Rectangle 4"/>
             <p:cNvSpPr/>
             <p:nvPr/>
           </p:nvSpPr>
@@ -9498,7 +10198,7 @@
         </p:sp>
         <p:sp>
           <p:nvSpPr>
-            <p:cNvPr id="5" name="Rectangle 4"/>
+            <p:cNvPr id="6" name="Rectangle 5"/>
             <p:cNvSpPr/>
             <p:nvPr/>
           </p:nvSpPr>
@@ -9544,7 +10244,7 @@
         </p:sp>
         <p:sp>
           <p:nvSpPr>
-            <p:cNvPr id="6" name="Rectangle 5"/>
+            <p:cNvPr id="7" name="Rectangle 6"/>
             <p:cNvSpPr/>
             <p:nvPr/>
           </p:nvSpPr>
@@ -9590,7 +10290,7 @@
         </p:sp>
         <p:sp>
           <p:nvSpPr>
-            <p:cNvPr id="7" name="Rectangle 6"/>
+            <p:cNvPr id="8" name="Rectangle 7"/>
             <p:cNvSpPr/>
             <p:nvPr/>
           </p:nvSpPr>
@@ -9636,7 +10336,7 @@
         </p:sp>
         <p:sp>
           <p:nvSpPr>
-            <p:cNvPr id="8" name="Rectangle 7"/>
+            <p:cNvPr id="9" name="Rectangle 8"/>
             <p:cNvSpPr/>
             <p:nvPr/>
           </p:nvSpPr>
@@ -9682,7 +10382,7 @@
         </p:sp>
         <p:sp>
           <p:nvSpPr>
-            <p:cNvPr id="9" name="TextBox 8"/>
+            <p:cNvPr id="10" name="TextBox 9"/>
             <p:cNvSpPr txBox="1"/>
             <p:nvPr/>
           </p:nvSpPr>
@@ -9717,7 +10417,7 @@
       </p:grpSp>
       <p:sp>
         <p:nvSpPr>
-          <p:cNvPr id="10" name="TextBox 9"/>
+          <p:cNvPr id="11" name="TextBox 10"/>
           <p:cNvSpPr txBox="1"/>
           <p:nvPr/>
         </p:nvSpPr>
@@ -9775,9 +10475,41 @@
         <p:nvPr/>
       </p:nvGrpSpPr>
       <p:grpSpPr/>
+      <p:sp>
+        <p:nvSpPr>
+          <p:cNvPr id="2" name="Title 1"/>
+          <p:cNvSpPr>
+            <a:spLocks noGrp="1"/>
+          </p:cNvSpPr>
+          <p:nvPr>
+            <p:ph type="title"/>
+          </p:nvPr>
+        </p:nvSpPr>
+        <p:spPr>
+          <a:xfrm>
+            <a:off x="-12191695" y="0"/>
+            <a:ext cx="12191695" cy="914400"/>
+          </a:xfrm>
+        </p:spPr>
+        <p:txBody>
+          <a:bodyPr/>
+          <a:lstStyle/>
+          <a:p>
+            <a:r>
+              <a:t>Discussion question</a:t>
+            </a:r>
+          </a:p>
+        </p:txBody>
+      </p:sp>
       <p:grpSp>
         <p:nvGrpSpPr>
-          <p:cNvPr id="2" name="Group 1"/>
+          <p:cNvPr id="3" name="Window discuss.txt">
+            <a:extLst>
+              <a:ext uri="{C183D7F6-B498-43B3-948B-1728B52AA6E4}">
+                <adec:decorative xmlns:adec="http://schemas.microsoft.com/office/drawing/2017/decorative" val="1"/>
+              </a:ext>
+            </a:extLst>
+          </p:cNvPr>
           <p:cNvGrpSpPr/>
           <p:nvPr/>
         </p:nvGrpSpPr>
@@ -9791,7 +10523,7 @@
         </p:grpSpPr>
         <p:sp>
           <p:nvSpPr>
-            <p:cNvPr id="3" name="Rectangle 2"/>
+            <p:cNvPr id="4" name="Rectangle 3"/>
             <p:cNvSpPr/>
             <p:nvPr/>
           </p:nvSpPr>
@@ -9835,7 +10567,7 @@
         </p:sp>
         <p:sp>
           <p:nvSpPr>
-            <p:cNvPr id="4" name="Rectangle 3"/>
+            <p:cNvPr id="5" name="Rectangle 4"/>
             <p:cNvSpPr/>
             <p:nvPr/>
           </p:nvSpPr>
@@ -9881,7 +10613,7 @@
         </p:sp>
         <p:sp>
           <p:nvSpPr>
-            <p:cNvPr id="5" name="Rectangle 4"/>
+            <p:cNvPr id="6" name="Rectangle 5"/>
             <p:cNvSpPr/>
             <p:nvPr/>
           </p:nvSpPr>
@@ -9927,7 +10659,7 @@
         </p:sp>
         <p:sp>
           <p:nvSpPr>
-            <p:cNvPr id="6" name="Rectangle 5"/>
+            <p:cNvPr id="7" name="Rectangle 6"/>
             <p:cNvSpPr/>
             <p:nvPr/>
           </p:nvSpPr>
@@ -9973,7 +10705,7 @@
         </p:sp>
         <p:sp>
           <p:nvSpPr>
-            <p:cNvPr id="7" name="Rectangle 6"/>
+            <p:cNvPr id="8" name="Rectangle 7"/>
             <p:cNvSpPr/>
             <p:nvPr/>
           </p:nvSpPr>
@@ -10019,7 +10751,7 @@
         </p:sp>
         <p:sp>
           <p:nvSpPr>
-            <p:cNvPr id="8" name="Rectangle 7"/>
+            <p:cNvPr id="9" name="Rectangle 8"/>
             <p:cNvSpPr/>
             <p:nvPr/>
           </p:nvSpPr>
@@ -10065,7 +10797,7 @@
         </p:sp>
         <p:sp>
           <p:nvSpPr>
-            <p:cNvPr id="9" name="TextBox 8"/>
+            <p:cNvPr id="10" name="TextBox 9"/>
             <p:cNvSpPr txBox="1"/>
             <p:nvPr/>
           </p:nvSpPr>
@@ -10100,7 +10832,7 @@
       </p:grpSp>
       <p:sp>
         <p:nvSpPr>
-          <p:cNvPr id="10" name="TextBox 9"/>
+          <p:cNvPr id="11" name="TextBox 10"/>
           <p:cNvSpPr txBox="1"/>
           <p:nvPr/>
         </p:nvSpPr>
@@ -10131,6 +10863,11 @@
             </a:r>
           </a:p>
           <a:p>
+            <a:pPr>
+              <a:spcBef>
+                <a:spcPts val="1200"/>
+              </a:spcBef>
+            </a:pPr>
             <a:r>
               <a:rPr sz="2000" b="0" i="0">
                 <a:solidFill>
@@ -10169,9 +10906,41 @@
         <p:nvPr/>
       </p:nvGrpSpPr>
       <p:grpSpPr/>
+      <p:sp>
+        <p:nvSpPr>
+          <p:cNvPr id="2" name="Title 1"/>
+          <p:cNvSpPr>
+            <a:spLocks noGrp="1"/>
+          </p:cNvSpPr>
+          <p:nvPr>
+            <p:ph type="title"/>
+          </p:nvPr>
+        </p:nvSpPr>
+        <p:spPr>
+          <a:xfrm>
+            <a:off x="-12191695" y="0"/>
+            <a:ext cx="12191695" cy="914400"/>
+          </a:xfrm>
+        </p:spPr>
+        <p:txBody>
+          <a:bodyPr/>
+          <a:lstStyle/>
+          <a:p>
+            <a:r>
+              <a:t>Close reading: one passage, slowly. Distant reading: patterns across many texts.</a:t>
+            </a:r>
+          </a:p>
+        </p:txBody>
+      </p:sp>
       <p:grpSp>
         <p:nvGrpSpPr>
-          <p:cNvPr id="2" name="Group 1"/>
+          <p:cNvPr id="3" name="Window image.png">
+            <a:extLst>
+              <a:ext uri="{C183D7F6-B498-43B3-948B-1728B52AA6E4}">
+                <adec:decorative xmlns:adec="http://schemas.microsoft.com/office/drawing/2017/decorative" val="1"/>
+              </a:ext>
+            </a:extLst>
+          </p:cNvPr>
           <p:cNvGrpSpPr/>
           <p:nvPr/>
         </p:nvGrpSpPr>
@@ -10185,7 +10954,7 @@
         </p:grpSpPr>
         <p:sp>
           <p:nvSpPr>
-            <p:cNvPr id="3" name="Rectangle 2"/>
+            <p:cNvPr id="4" name="Rectangle 3"/>
             <p:cNvSpPr/>
             <p:nvPr/>
           </p:nvSpPr>
@@ -10229,7 +10998,7 @@
         </p:sp>
         <p:sp>
           <p:nvSpPr>
-            <p:cNvPr id="4" name="Rectangle 3"/>
+            <p:cNvPr id="5" name="Rectangle 4"/>
             <p:cNvSpPr/>
             <p:nvPr/>
           </p:nvSpPr>
@@ -10275,7 +11044,7 @@
         </p:sp>
         <p:sp>
           <p:nvSpPr>
-            <p:cNvPr id="5" name="Rectangle 4"/>
+            <p:cNvPr id="6" name="Rectangle 5"/>
             <p:cNvSpPr/>
             <p:nvPr/>
           </p:nvSpPr>
@@ -10321,7 +11090,7 @@
         </p:sp>
         <p:sp>
           <p:nvSpPr>
-            <p:cNvPr id="6" name="Rectangle 5"/>
+            <p:cNvPr id="7" name="Rectangle 6"/>
             <p:cNvSpPr/>
             <p:nvPr/>
           </p:nvSpPr>
@@ -10367,7 +11136,7 @@
         </p:sp>
         <p:sp>
           <p:nvSpPr>
-            <p:cNvPr id="7" name="Rectangle 6"/>
+            <p:cNvPr id="8" name="Rectangle 7"/>
             <p:cNvSpPr/>
             <p:nvPr/>
           </p:nvSpPr>
@@ -10413,7 +11182,7 @@
         </p:sp>
         <p:sp>
           <p:nvSpPr>
-            <p:cNvPr id="8" name="Rectangle 7"/>
+            <p:cNvPr id="9" name="Rectangle 8"/>
             <p:cNvSpPr/>
             <p:nvPr/>
           </p:nvSpPr>
@@ -10459,7 +11228,7 @@
         </p:sp>
         <p:sp>
           <p:nvSpPr>
-            <p:cNvPr id="9" name="TextBox 8"/>
+            <p:cNvPr id="10" name="TextBox 9"/>
             <p:cNvSpPr txBox="1"/>
             <p:nvPr/>
           </p:nvSpPr>
@@ -10494,7 +11263,7 @@
       </p:grpSp>
       <p:pic>
         <p:nvPicPr>
-          <p:cNvPr id="10" name="Picture 9" descr="An open hardcover book photographed against a gray background, its pages fanned upward in a dense spray."/>
+          <p:cNvPr id="11" name="Picture 10" descr="An open hardcover book photographed against a gray background, its pages fanned upward in a dense spray."/>
           <p:cNvPicPr>
             <a:picLocks noChangeAspect="1"/>
           </p:cNvPicPr>
@@ -10518,13 +11287,13 @@
       </p:pic>
       <p:sp>
         <p:nvSpPr>
-          <p:cNvPr id="11" name="TextBox 10"/>
+          <p:cNvPr id="12" name="TextBox 11"/>
           <p:cNvSpPr txBox="1"/>
           <p:nvPr/>
         </p:nvSpPr>
         <p:spPr>
           <a:xfrm>
-            <a:off x="822960" y="5989320"/>
+            <a:off x="822960" y="5943600"/>
             <a:ext cx="10545775" cy="731520"/>
           </a:xfrm>
           <a:prstGeom prst="rect">
@@ -10579,14 +11348,40 @@
       <p:grpSpPr/>
       <p:sp>
         <p:nvSpPr>
-          <p:cNvPr id="2" name="TextBox 1"/>
+          <p:cNvPr id="2" name="Title 1"/>
+          <p:cNvSpPr>
+            <a:spLocks noGrp="1"/>
+          </p:cNvSpPr>
+          <p:nvPr>
+            <p:ph type="title"/>
+          </p:nvPr>
+        </p:nvSpPr>
+        <p:spPr>
+          <a:xfrm>
+            <a:off x="-12191695" y="0"/>
+            <a:ext cx="12191695" cy="914400"/>
+          </a:xfrm>
+        </p:spPr>
+        <p:txBody>
+          <a:bodyPr/>
+          <a:lstStyle/>
+          <a:p>
+            <a:r>
+              <a:t>Seven ways</a:t>
+            </a:r>
+          </a:p>
+        </p:txBody>
+      </p:sp>
+      <p:sp>
+        <p:nvSpPr>
+          <p:cNvPr id="3" name="TextBox 2"/>
           <p:cNvSpPr txBox="1"/>
           <p:nvPr/>
         </p:nvSpPr>
         <p:spPr>
           <a:xfrm>
-            <a:off x="731520" y="1463040"/>
-            <a:ext cx="10728655" cy="2926080"/>
+            <a:off x="274320" y="1417320"/>
+            <a:ext cx="11643055" cy="4023360"/>
           </a:xfrm>
           <a:prstGeom prst="rect">
             <a:avLst/>
@@ -10611,7 +11406,11 @@
             </a:r>
           </a:p>
           <a:p>
-            <a:pPr algn="ctr"/>
+            <a:pPr algn="ctr">
+              <a:spcBef>
+                <a:spcPts val="1000"/>
+              </a:spcBef>
+            </a:pPr>
             <a:r>
               <a:rPr sz="2800" b="0" i="0">
                 <a:solidFill>
@@ -10650,9 +11449,41 @@
         <p:nvPr/>
       </p:nvGrpSpPr>
       <p:grpSpPr/>
+      <p:sp>
+        <p:nvSpPr>
+          <p:cNvPr id="2" name="Title 1"/>
+          <p:cNvSpPr>
+            <a:spLocks noGrp="1"/>
+          </p:cNvSpPr>
+          <p:nvPr>
+            <p:ph type="title"/>
+          </p:nvPr>
+        </p:nvSpPr>
+        <p:spPr>
+          <a:xfrm>
+            <a:off x="-12191695" y="0"/>
+            <a:ext cx="12191695" cy="914400"/>
+          </a:xfrm>
+        </p:spPr>
+        <p:txBody>
+          <a:bodyPr/>
+          <a:lstStyle/>
+          <a:p>
+            <a:r>
+              <a:t>Quote: Ted Underwood, 2015</a:t>
+            </a:r>
+          </a:p>
+        </p:txBody>
+      </p:sp>
       <p:grpSp>
         <p:nvGrpSpPr>
-          <p:cNvPr id="2" name="Group 1"/>
+          <p:cNvPr id="3" name="Window quote.txt">
+            <a:extLst>
+              <a:ext uri="{C183D7F6-B498-43B3-948B-1728B52AA6E4}">
+                <adec:decorative xmlns:adec="http://schemas.microsoft.com/office/drawing/2017/decorative" val="1"/>
+              </a:ext>
+            </a:extLst>
+          </p:cNvPr>
           <p:cNvGrpSpPr/>
           <p:nvPr/>
         </p:nvGrpSpPr>
@@ -10666,7 +11497,7 @@
         </p:grpSpPr>
         <p:sp>
           <p:nvSpPr>
-            <p:cNvPr id="3" name="Rectangle 2"/>
+            <p:cNvPr id="4" name="Rectangle 3"/>
             <p:cNvSpPr/>
             <p:nvPr/>
           </p:nvSpPr>
@@ -10710,7 +11541,7 @@
         </p:sp>
         <p:sp>
           <p:nvSpPr>
-            <p:cNvPr id="4" name="Rectangle 3"/>
+            <p:cNvPr id="5" name="Rectangle 4"/>
             <p:cNvSpPr/>
             <p:nvPr/>
           </p:nvSpPr>
@@ -10756,7 +11587,7 @@
         </p:sp>
         <p:sp>
           <p:nvSpPr>
-            <p:cNvPr id="5" name="Rectangle 4"/>
+            <p:cNvPr id="6" name="Rectangle 5"/>
             <p:cNvSpPr/>
             <p:nvPr/>
           </p:nvSpPr>
@@ -10802,7 +11633,7 @@
         </p:sp>
         <p:sp>
           <p:nvSpPr>
-            <p:cNvPr id="6" name="Rectangle 5"/>
+            <p:cNvPr id="7" name="Rectangle 6"/>
             <p:cNvSpPr/>
             <p:nvPr/>
           </p:nvSpPr>
@@ -10848,7 +11679,7 @@
         </p:sp>
         <p:sp>
           <p:nvSpPr>
-            <p:cNvPr id="7" name="Rectangle 6"/>
+            <p:cNvPr id="8" name="Rectangle 7"/>
             <p:cNvSpPr/>
             <p:nvPr/>
           </p:nvSpPr>
@@ -10894,7 +11725,7 @@
         </p:sp>
         <p:sp>
           <p:nvSpPr>
-            <p:cNvPr id="8" name="Rectangle 7"/>
+            <p:cNvPr id="9" name="Rectangle 8"/>
             <p:cNvSpPr/>
             <p:nvPr/>
           </p:nvSpPr>
@@ -10940,7 +11771,7 @@
         </p:sp>
         <p:sp>
           <p:nvSpPr>
-            <p:cNvPr id="9" name="TextBox 8"/>
+            <p:cNvPr id="10" name="TextBox 9"/>
             <p:cNvSpPr txBox="1"/>
             <p:nvPr/>
           </p:nvSpPr>
@@ -10975,7 +11806,7 @@
       </p:grpSp>
       <p:sp>
         <p:nvSpPr>
-          <p:cNvPr id="10" name="TextBox 9"/>
+          <p:cNvPr id="11" name="TextBox 10"/>
           <p:cNvSpPr txBox="1"/>
           <p:nvPr/>
         </p:nvSpPr>
@@ -11009,7 +11840,7 @@
       </p:sp>
       <p:sp>
         <p:nvSpPr>
-          <p:cNvPr id="11" name="TextBox 10"/>
+          <p:cNvPr id="12" name="TextBox 11"/>
           <p:cNvSpPr txBox="1"/>
           <p:nvPr/>
         </p:nvSpPr>
@@ -11080,7 +11911,33 @@
       <p:grpSpPr/>
       <p:sp>
         <p:nvSpPr>
-          <p:cNvPr id="2" name="TextBox 1"/>
+          <p:cNvPr id="2" name="Title 1"/>
+          <p:cNvSpPr>
+            <a:spLocks noGrp="1"/>
+          </p:cNvSpPr>
+          <p:nvPr>
+            <p:ph type="title"/>
+          </p:nvPr>
+        </p:nvSpPr>
+        <p:spPr>
+          <a:xfrm>
+            <a:off x="-12191695" y="0"/>
+            <a:ext cx="12191695" cy="914400"/>
+          </a:xfrm>
+        </p:spPr>
+        <p:txBody>
+          <a:bodyPr/>
+          <a:lstStyle/>
+          <a:p>
+            <a:r>
+              <a:t>Underwood's seven ways</a:t>
+            </a:r>
+          </a:p>
+        </p:txBody>
+      </p:sp>
+      <p:sp>
+        <p:nvSpPr>
+          <p:cNvPr id="3" name="TextBox 2"/>
           <p:cNvSpPr txBox="1"/>
           <p:nvPr/>
         </p:nvSpPr>
@@ -11114,7 +11971,7 @@
       </p:sp>
       <p:sp>
         <p:nvSpPr>
-          <p:cNvPr id="3" name="TextBox 2"/>
+          <p:cNvPr id="4" name="TextBox 3"/>
           <p:cNvSpPr txBox="1"/>
           <p:nvPr/>
         </p:nvSpPr>
@@ -11280,9 +12137,41 @@
         <p:nvPr/>
       </p:nvGrpSpPr>
       <p:grpSpPr/>
+      <p:sp>
+        <p:nvSpPr>
+          <p:cNvPr id="2" name="Title 1"/>
+          <p:cNvSpPr>
+            <a:spLocks noGrp="1"/>
+          </p:cNvSpPr>
+          <p:nvPr>
+            <p:ph type="title"/>
+          </p:nvPr>
+        </p:nvSpPr>
+        <p:spPr>
+          <a:xfrm>
+            <a:off x="-12191695" y="0"/>
+            <a:ext cx="12191695" cy="914400"/>
+          </a:xfrm>
+        </p:spPr>
+        <p:txBody>
+          <a:bodyPr/>
+          <a:lstStyle/>
+          <a:p>
+            <a:r>
+              <a:t>Quote: Ted Underwood, 2015</a:t>
+            </a:r>
+          </a:p>
+        </p:txBody>
+      </p:sp>
       <p:grpSp>
         <p:nvGrpSpPr>
-          <p:cNvPr id="2" name="Group 1"/>
+          <p:cNvPr id="3" name="Window quote.txt">
+            <a:extLst>
+              <a:ext uri="{C183D7F6-B498-43B3-948B-1728B52AA6E4}">
+                <adec:decorative xmlns:adec="http://schemas.microsoft.com/office/drawing/2017/decorative" val="1"/>
+              </a:ext>
+            </a:extLst>
+          </p:cNvPr>
           <p:cNvGrpSpPr/>
           <p:nvPr/>
         </p:nvGrpSpPr>
@@ -11296,7 +12185,7 @@
         </p:grpSpPr>
         <p:sp>
           <p:nvSpPr>
-            <p:cNvPr id="3" name="Rectangle 2"/>
+            <p:cNvPr id="4" name="Rectangle 3"/>
             <p:cNvSpPr/>
             <p:nvPr/>
           </p:nvSpPr>
@@ -11340,7 +12229,7 @@
         </p:sp>
         <p:sp>
           <p:nvSpPr>
-            <p:cNvPr id="4" name="Rectangle 3"/>
+            <p:cNvPr id="5" name="Rectangle 4"/>
             <p:cNvSpPr/>
             <p:nvPr/>
           </p:nvSpPr>
@@ -11386,7 +12275,7 @@
         </p:sp>
         <p:sp>
           <p:nvSpPr>
-            <p:cNvPr id="5" name="Rectangle 4"/>
+            <p:cNvPr id="6" name="Rectangle 5"/>
             <p:cNvSpPr/>
             <p:nvPr/>
           </p:nvSpPr>
@@ -11432,7 +12321,7 @@
         </p:sp>
         <p:sp>
           <p:nvSpPr>
-            <p:cNvPr id="6" name="Rectangle 5"/>
+            <p:cNvPr id="7" name="Rectangle 6"/>
             <p:cNvSpPr/>
             <p:nvPr/>
           </p:nvSpPr>
@@ -11478,7 +12367,7 @@
         </p:sp>
         <p:sp>
           <p:nvSpPr>
-            <p:cNvPr id="7" name="Rectangle 6"/>
+            <p:cNvPr id="8" name="Rectangle 7"/>
             <p:cNvSpPr/>
             <p:nvPr/>
           </p:nvSpPr>
@@ -11524,7 +12413,7 @@
         </p:sp>
         <p:sp>
           <p:nvSpPr>
-            <p:cNvPr id="8" name="Rectangle 7"/>
+            <p:cNvPr id="9" name="Rectangle 8"/>
             <p:cNvSpPr/>
             <p:nvPr/>
           </p:nvSpPr>
@@ -11570,7 +12459,7 @@
         </p:sp>
         <p:sp>
           <p:nvSpPr>
-            <p:cNvPr id="9" name="TextBox 8"/>
+            <p:cNvPr id="10" name="TextBox 9"/>
             <p:cNvSpPr txBox="1"/>
             <p:nvPr/>
           </p:nvSpPr>
@@ -11605,7 +12494,7 @@
       </p:grpSp>
       <p:sp>
         <p:nvSpPr>
-          <p:cNvPr id="10" name="TextBox 9"/>
+          <p:cNvPr id="11" name="TextBox 10"/>
           <p:cNvSpPr txBox="1"/>
           <p:nvPr/>
         </p:nvSpPr>
@@ -11639,7 +12528,7 @@
       </p:sp>
       <p:sp>
         <p:nvSpPr>
-          <p:cNvPr id="11" name="TextBox 10"/>
+          <p:cNvPr id="12" name="TextBox 11"/>
           <p:cNvSpPr txBox="1"/>
           <p:nvPr/>
         </p:nvSpPr>
@@ -11708,9 +12597,41 @@
         <p:nvPr/>
       </p:nvGrpSpPr>
       <p:grpSpPr/>
+      <p:sp>
+        <p:nvSpPr>
+          <p:cNvPr id="2" name="Title 1"/>
+          <p:cNvSpPr>
+            <a:spLocks noGrp="1"/>
+          </p:cNvSpPr>
+          <p:nvPr>
+            <p:ph type="title"/>
+          </p:nvPr>
+        </p:nvSpPr>
+        <p:spPr>
+          <a:xfrm>
+            <a:off x="-12191695" y="0"/>
+            <a:ext cx="12191695" cy="914400"/>
+          </a:xfrm>
+        </p:spPr>
+        <p:txBody>
+          <a:bodyPr/>
+          <a:lstStyle/>
+          <a:p>
+            <a:r>
+              <a:t>Quote: Ted Underwood, 2015</a:t>
+            </a:r>
+          </a:p>
+        </p:txBody>
+      </p:sp>
       <p:grpSp>
         <p:nvGrpSpPr>
-          <p:cNvPr id="2" name="Group 1"/>
+          <p:cNvPr id="3" name="Window quote.txt">
+            <a:extLst>
+              <a:ext uri="{C183D7F6-B498-43B3-948B-1728B52AA6E4}">
+                <adec:decorative xmlns:adec="http://schemas.microsoft.com/office/drawing/2017/decorative" val="1"/>
+              </a:ext>
+            </a:extLst>
+          </p:cNvPr>
           <p:cNvGrpSpPr/>
           <p:nvPr/>
         </p:nvGrpSpPr>
@@ -11724,7 +12645,7 @@
         </p:grpSpPr>
         <p:sp>
           <p:nvSpPr>
-            <p:cNvPr id="3" name="Rectangle 2"/>
+            <p:cNvPr id="4" name="Rectangle 3"/>
             <p:cNvSpPr/>
             <p:nvPr/>
           </p:nvSpPr>
@@ -11768,7 +12689,7 @@
         </p:sp>
         <p:sp>
           <p:nvSpPr>
-            <p:cNvPr id="4" name="Rectangle 3"/>
+            <p:cNvPr id="5" name="Rectangle 4"/>
             <p:cNvSpPr/>
             <p:nvPr/>
           </p:nvSpPr>
@@ -11814,7 +12735,7 @@
         </p:sp>
         <p:sp>
           <p:nvSpPr>
-            <p:cNvPr id="5" name="Rectangle 4"/>
+            <p:cNvPr id="6" name="Rectangle 5"/>
             <p:cNvSpPr/>
             <p:nvPr/>
           </p:nvSpPr>
@@ -11860,7 +12781,7 @@
         </p:sp>
         <p:sp>
           <p:nvSpPr>
-            <p:cNvPr id="6" name="Rectangle 5"/>
+            <p:cNvPr id="7" name="Rectangle 6"/>
             <p:cNvSpPr/>
             <p:nvPr/>
           </p:nvSpPr>
@@ -11906,7 +12827,7 @@
         </p:sp>
         <p:sp>
           <p:nvSpPr>
-            <p:cNvPr id="7" name="Rectangle 6"/>
+            <p:cNvPr id="8" name="Rectangle 7"/>
             <p:cNvSpPr/>
             <p:nvPr/>
           </p:nvSpPr>
@@ -11952,7 +12873,7 @@
         </p:sp>
         <p:sp>
           <p:nvSpPr>
-            <p:cNvPr id="8" name="Rectangle 7"/>
+            <p:cNvPr id="9" name="Rectangle 8"/>
             <p:cNvSpPr/>
             <p:nvPr/>
           </p:nvSpPr>
@@ -11998,7 +12919,7 @@
         </p:sp>
         <p:sp>
           <p:nvSpPr>
-            <p:cNvPr id="9" name="TextBox 8"/>
+            <p:cNvPr id="10" name="TextBox 9"/>
             <p:cNvSpPr txBox="1"/>
             <p:nvPr/>
           </p:nvSpPr>
@@ -12033,7 +12954,7 @@
       </p:grpSp>
       <p:sp>
         <p:nvSpPr>
-          <p:cNvPr id="10" name="TextBox 9"/>
+          <p:cNvPr id="11" name="TextBox 10"/>
           <p:cNvSpPr txBox="1"/>
           <p:nvPr/>
         </p:nvSpPr>
@@ -12067,7 +12988,7 @@
       </p:sp>
       <p:sp>
         <p:nvSpPr>
-          <p:cNvPr id="11" name="TextBox 10"/>
+          <p:cNvPr id="12" name="TextBox 11"/>
           <p:cNvSpPr txBox="1"/>
           <p:nvPr/>
         </p:nvSpPr>
@@ -12136,9 +13057,41 @@
         <p:nvPr/>
       </p:nvGrpSpPr>
       <p:grpSpPr/>
+      <p:sp>
+        <p:nvSpPr>
+          <p:cNvPr id="2" name="Title 1"/>
+          <p:cNvSpPr>
+            <a:spLocks noGrp="1"/>
+          </p:cNvSpPr>
+          <p:nvPr>
+            <p:ph type="title"/>
+          </p:nvPr>
+        </p:nvSpPr>
+        <p:spPr>
+          <a:xfrm>
+            <a:off x="-12191695" y="0"/>
+            <a:ext cx="12191695" cy="914400"/>
+          </a:xfrm>
+        </p:spPr>
+        <p:txBody>
+          <a:bodyPr/>
+          <a:lstStyle/>
+          <a:p>
+            <a:r>
+              <a:t>Quote: Ted Underwood, 2015</a:t>
+            </a:r>
+          </a:p>
+        </p:txBody>
+      </p:sp>
       <p:grpSp>
         <p:nvGrpSpPr>
-          <p:cNvPr id="2" name="Group 1"/>
+          <p:cNvPr id="3" name="Window quote.txt">
+            <a:extLst>
+              <a:ext uri="{C183D7F6-B498-43B3-948B-1728B52AA6E4}">
+                <adec:decorative xmlns:adec="http://schemas.microsoft.com/office/drawing/2017/decorative" val="1"/>
+              </a:ext>
+            </a:extLst>
+          </p:cNvPr>
           <p:cNvGrpSpPr/>
           <p:nvPr/>
         </p:nvGrpSpPr>
@@ -12152,7 +13105,7 @@
         </p:grpSpPr>
         <p:sp>
           <p:nvSpPr>
-            <p:cNvPr id="3" name="Rectangle 2"/>
+            <p:cNvPr id="4" name="Rectangle 3"/>
             <p:cNvSpPr/>
             <p:nvPr/>
           </p:nvSpPr>
@@ -12196,7 +13149,7 @@
         </p:sp>
         <p:sp>
           <p:nvSpPr>
-            <p:cNvPr id="4" name="Rectangle 3"/>
+            <p:cNvPr id="5" name="Rectangle 4"/>
             <p:cNvSpPr/>
             <p:nvPr/>
           </p:nvSpPr>
@@ -12242,7 +13195,7 @@
         </p:sp>
         <p:sp>
           <p:nvSpPr>
-            <p:cNvPr id="5" name="Rectangle 4"/>
+            <p:cNvPr id="6" name="Rectangle 5"/>
             <p:cNvSpPr/>
             <p:nvPr/>
           </p:nvSpPr>
@@ -12288,7 +13241,7 @@
         </p:sp>
         <p:sp>
           <p:nvSpPr>
-            <p:cNvPr id="6" name="Rectangle 5"/>
+            <p:cNvPr id="7" name="Rectangle 6"/>
             <p:cNvSpPr/>
             <p:nvPr/>
           </p:nvSpPr>
@@ -12334,7 +13287,7 @@
         </p:sp>
         <p:sp>
           <p:nvSpPr>
-            <p:cNvPr id="7" name="Rectangle 6"/>
+            <p:cNvPr id="8" name="Rectangle 7"/>
             <p:cNvSpPr/>
             <p:nvPr/>
           </p:nvSpPr>
@@ -12380,7 +13333,7 @@
         </p:sp>
         <p:sp>
           <p:nvSpPr>
-            <p:cNvPr id="8" name="Rectangle 7"/>
+            <p:cNvPr id="9" name="Rectangle 8"/>
             <p:cNvSpPr/>
             <p:nvPr/>
           </p:nvSpPr>
@@ -12426,7 +13379,7 @@
         </p:sp>
         <p:sp>
           <p:nvSpPr>
-            <p:cNvPr id="9" name="TextBox 8"/>
+            <p:cNvPr id="10" name="TextBox 9"/>
             <p:cNvSpPr txBox="1"/>
             <p:nvPr/>
           </p:nvSpPr>
@@ -12461,7 +13414,7 @@
       </p:grpSp>
       <p:sp>
         <p:nvSpPr>
-          <p:cNvPr id="10" name="TextBox 9"/>
+          <p:cNvPr id="11" name="TextBox 10"/>
           <p:cNvSpPr txBox="1"/>
           <p:nvPr/>
         </p:nvSpPr>
@@ -12482,7 +13435,7 @@
           <a:lstStyle/>
           <a:p>
             <a:r>
-              <a:rPr sz="2200" b="0" i="0">
+              <a:rPr sz="2800" b="0" i="0">
                 <a:solidFill>
                   <a:srgbClr val="1B1035"/>
                 </a:solidFill>
@@ -12495,7 +13448,7 @@
       </p:sp>
       <p:sp>
         <p:nvSpPr>
-          <p:cNvPr id="11" name="TextBox 10"/>
+          <p:cNvPr id="12" name="TextBox 11"/>
           <p:cNvSpPr txBox="1"/>
           <p:nvPr/>
         </p:nvSpPr>
